--- a/courseware/202610_ADS_W06_Matrices_Sorting_Greedy.pptx
+++ b/courseware/202610_ADS_W06_Matrices_Sorting_Greedy.pptx
@@ -14598,7 +14598,7 @@
                           <a:latin typeface="Segoe UI"/>
                           <a:ea typeface="微软雅黑"/>
                         </a:rPr>
-                        <a:t>最大最小整数 v0.3</a:t>
+                        <a:t>最大最小整数</a:t>
                       </a:r>
                     </a:p>
                   </a:txBody>

--- a/courseware/202610_ADS_W06_Matrices_Sorting_Greedy.pptx
+++ b/courseware/202610_ADS_W06_Matrices_Sorting_Greedy.pptx
@@ -32,6 +32,11 @@
     <p:sldId id="280" r:id="rId31"/>
     <p:sldId id="281" r:id="rId32"/>
     <p:sldId id="282" r:id="rId33"/>
+    <p:sldId id="283" r:id="rId34"/>
+    <p:sldId id="284" r:id="rId35"/>
+    <p:sldId id="285" r:id="rId36"/>
+    <p:sldId id="286" r:id="rId37"/>
+    <p:sldId id="287" r:id="rId38"/>
   </p:sldIdLst>
   <p:sldSz cx="12191695" cy="6858000" type="screen4x3"/>
   <p:notesSz cx="6858000" cy="9144000"/>
@@ -10065,6 +10070,2650 @@
                 <a:latin typeface="Segoe UI"/>
                 <a:ea typeface="微软雅黑"/>
               </a:rPr>
+              <a:t>交换论证的三步骨架</a:t>
+            </a:r>
+          </a:p>
+        </p:txBody>
+      </p:sp>
+      <p:sp>
+        <p:nvSpPr>
+          <p:cNvPr id="3" name="Rectangle 2"/>
+          <p:cNvSpPr/>
+          <p:nvPr/>
+        </p:nvSpPr>
+        <p:spPr>
+          <a:xfrm>
+            <a:off x="566928" y="1060704"/>
+            <a:ext cx="960120" cy="40640"/>
+          </a:xfrm>
+          <a:prstGeom prst="rect">
+            <a:avLst/>
+          </a:prstGeom>
+          <a:solidFill>
+            <a:srgbClr val="E07B39"/>
+          </a:solidFill>
+          <a:ln>
+            <a:noFill/>
+          </a:ln>
+          <a:effectLst/>
+        </p:spPr>
+        <p:style>
+          <a:lnRef idx="1">
+            <a:schemeClr val="accent1"/>
+          </a:lnRef>
+          <a:fillRef idx="3">
+            <a:schemeClr val="accent1"/>
+          </a:fillRef>
+          <a:effectRef idx="2">
+            <a:schemeClr val="accent1"/>
+          </a:effectRef>
+          <a:fontRef idx="minor">
+            <a:schemeClr val="lt1"/>
+          </a:fontRef>
+        </p:style>
+        <p:txBody>
+          <a:bodyPr rtlCol="0" anchor="ctr"/>
+          <a:lstStyle/>
+          <a:p>
+            <a:pPr algn="ctr"/>
+          </a:p>
+        </p:txBody>
+      </p:sp>
+      <p:sp>
+        <p:nvSpPr>
+          <p:cNvPr id="4" name="TextBox 3"/>
+          <p:cNvSpPr txBox="1"/>
+          <p:nvPr/>
+        </p:nvSpPr>
+        <p:spPr>
+          <a:xfrm>
+            <a:off x="566928" y="1298448"/>
+            <a:ext cx="11057839" cy="4864608"/>
+          </a:xfrm>
+          <a:prstGeom prst="rect">
+            <a:avLst/>
+          </a:prstGeom>
+          <a:noFill/>
+        </p:spPr>
+        <p:txBody>
+          <a:bodyPr wrap="square" lIns="0" rIns="0" tIns="0" bIns="0">
+            <a:noAutofit/>
+          </a:bodyPr>
+          <a:lstStyle/>
+          <a:p>
+            <a:pPr algn="l">
+              <a:lnSpc>
+                <a:spcPct val="132000"/>
+              </a:lnSpc>
+              <a:spcBef>
+                <a:spcPts val="0"/>
+              </a:spcBef>
+              <a:spcAft>
+                <a:spcPts val="1240"/>
+              </a:spcAft>
+            </a:pPr>
+            <a:r>
+              <a:rPr sz="2000" b="0" i="0">
+                <a:solidFill>
+                  <a:srgbClr val="242A33"/>
+                </a:solidFill>
+                <a:latin typeface="Segoe UI"/>
+                <a:ea typeface="微软雅黑"/>
+              </a:rPr>
+              <a:t>•  </a:t>
+            </a:r>
+            <a:r>
+              <a:rPr sz="2000" b="1" i="0">
+                <a:solidFill>
+                  <a:srgbClr val="12395B"/>
+                </a:solidFill>
+                <a:latin typeface="Segoe UI"/>
+                <a:ea typeface="微软雅黑"/>
+              </a:rPr>
+              <a:t>1. 取任意一个最优解 OPT</a:t>
+            </a:r>
+            <a:r>
+              <a:rPr sz="2000" b="0" i="0">
+                <a:solidFill>
+                  <a:srgbClr val="242A33"/>
+                </a:solidFill>
+                <a:latin typeface="Segoe UI"/>
+                <a:ea typeface="微软雅黑"/>
+              </a:rPr>
+              <a:t>，不假设它长什么样</a:t>
+            </a:r>
+          </a:p>
+          <a:p>
+            <a:pPr algn="l">
+              <a:lnSpc>
+                <a:spcPct val="132000"/>
+              </a:lnSpc>
+              <a:spcBef>
+                <a:spcPts val="0"/>
+              </a:spcBef>
+              <a:spcAft>
+                <a:spcPts val="1240"/>
+              </a:spcAft>
+            </a:pPr>
+            <a:r>
+              <a:rPr sz="2000" b="0" i="0">
+                <a:solidFill>
+                  <a:srgbClr val="242A33"/>
+                </a:solidFill>
+                <a:latin typeface="Segoe UI"/>
+                <a:ea typeface="微软雅黑"/>
+              </a:rPr>
+              <a:t>•  </a:t>
+            </a:r>
+            <a:r>
+              <a:rPr sz="2000" b="1" i="0">
+                <a:solidFill>
+                  <a:srgbClr val="12395B"/>
+                </a:solidFill>
+                <a:latin typeface="Segoe UI"/>
+                <a:ea typeface="微软雅黑"/>
+              </a:rPr>
+              <a:t>2. 若 OPT 里相邻两项 a、b 与规则 R 相反，就交换</a:t>
+            </a:r>
+            <a:r>
+              <a:rPr sz="2000" b="0" i="0">
+                <a:solidFill>
+                  <a:srgbClr val="242A33"/>
+                </a:solidFill>
+                <a:latin typeface="Segoe UI"/>
+                <a:ea typeface="微软雅黑"/>
+              </a:rPr>
+              <a:t>，并证明目标函数不会变差</a:t>
+            </a:r>
+          </a:p>
+          <a:p>
+            <a:pPr algn="l">
+              <a:lnSpc>
+                <a:spcPct val="132000"/>
+              </a:lnSpc>
+              <a:spcBef>
+                <a:spcPts val="0"/>
+              </a:spcBef>
+              <a:spcAft>
+                <a:spcPts val="1240"/>
+              </a:spcAft>
+            </a:pPr>
+            <a:r>
+              <a:rPr sz="2000" b="0" i="0">
+                <a:solidFill>
+                  <a:srgbClr val="242A33"/>
+                </a:solidFill>
+                <a:latin typeface="Segoe UI"/>
+                <a:ea typeface="微软雅黑"/>
+              </a:rPr>
+              <a:t>•  </a:t>
+            </a:r>
+            <a:r>
+              <a:rPr sz="2000" b="1" i="0">
+                <a:solidFill>
+                  <a:srgbClr val="12395B"/>
+                </a:solidFill>
+                <a:latin typeface="Segoe UI"/>
+                <a:ea typeface="微软雅黑"/>
+              </a:rPr>
+              <a:t>3. 每换一次逆序对至少减 1</a:t>
+            </a:r>
+            <a:r>
+              <a:rPr sz="2000" b="0" i="0">
+                <a:solidFill>
+                  <a:srgbClr val="242A33"/>
+                </a:solidFill>
+                <a:latin typeface="Segoe UI"/>
+                <a:ea typeface="微软雅黑"/>
+              </a:rPr>
+              <a:t>，逆序对有限 → 有限步后变成 R 序，且一路没变差</a:t>
+            </a:r>
+          </a:p>
+          <a:p>
+            <a:pPr algn="l">
+              <a:lnSpc>
+                <a:spcPct val="132000"/>
+              </a:lnSpc>
+              <a:spcBef>
+                <a:spcPts val="0"/>
+              </a:spcBef>
+              <a:spcAft>
+                <a:spcPts val="1240"/>
+              </a:spcAft>
+            </a:pPr>
+            <a:r>
+              <a:rPr sz="2000" b="0" i="0">
+                <a:solidFill>
+                  <a:srgbClr val="242A33"/>
+                </a:solidFill>
+                <a:latin typeface="Segoe UI"/>
+                <a:ea typeface="微软雅黑"/>
+              </a:rPr>
+              <a:t>•  结论是「</a:t>
+            </a:r>
+            <a:r>
+              <a:rPr sz="2000" b="1" i="0">
+                <a:solidFill>
+                  <a:srgbClr val="12395B"/>
+                </a:solidFill>
+                <a:latin typeface="Segoe UI"/>
+                <a:ea typeface="微软雅黑"/>
+              </a:rPr>
+              <a:t>最优值能被 R 序取到</a:t>
+            </a:r>
+            <a:r>
+              <a:rPr sz="2000" b="0" i="0">
+                <a:solidFill>
+                  <a:srgbClr val="242A33"/>
+                </a:solidFill>
+                <a:latin typeface="Segoe UI"/>
+                <a:ea typeface="微软雅黑"/>
+              </a:rPr>
+              <a:t>」，不是「R 序是唯一最优解」—— 贪心只需要前者</a:t>
+            </a:r>
+          </a:p>
+          <a:p>
+            <a:pPr algn="l">
+              <a:lnSpc>
+                <a:spcPct val="132000"/>
+              </a:lnSpc>
+              <a:spcBef>
+                <a:spcPts val="0"/>
+              </a:spcBef>
+              <a:spcAft>
+                <a:spcPts val="1240"/>
+              </a:spcAft>
+            </a:pPr>
+            <a:r>
+              <a:rPr sz="2000" b="0" i="0">
+                <a:solidFill>
+                  <a:srgbClr val="242A33"/>
+                </a:solidFill>
+                <a:latin typeface="Segoe UI"/>
+                <a:ea typeface="微软雅黑"/>
+              </a:rPr>
+              <a:t>•  </a:t>
+            </a:r>
+            <a:r>
+              <a:rPr sz="2000" b="1" i="0">
+                <a:solidFill>
+                  <a:srgbClr val="12395B"/>
+                </a:solidFill>
+                <a:latin typeface="Segoe UI"/>
+                <a:ea typeface="微软雅黑"/>
+              </a:rPr>
+              <a:t>为什么必须相邻</a:t>
+            </a:r>
+            <a:r>
+              <a:rPr sz="2000" b="0" i="0">
+                <a:solidFill>
+                  <a:srgbClr val="242A33"/>
+                </a:solidFill>
+                <a:latin typeface="Segoe UI"/>
+                <a:ea typeface="微软雅黑"/>
+              </a:rPr>
+              <a:t>：只有相邻交换才保证其余各项的贡献不变，差值里才只剩 a、b 互相的那一项</a:t>
+            </a:r>
+          </a:p>
+          <a:p>
+            <a:pPr algn="l">
+              <a:lnSpc>
+                <a:spcPct val="132000"/>
+              </a:lnSpc>
+              <a:spcBef>
+                <a:spcPts val="0"/>
+              </a:spcBef>
+              <a:spcAft>
+                <a:spcPts val="1240"/>
+              </a:spcAft>
+            </a:pPr>
+            <a:r>
+              <a:rPr sz="2000" b="0" i="0">
+                <a:solidFill>
+                  <a:srgbClr val="242A33"/>
+                </a:solidFill>
+                <a:latin typeface="Segoe UI"/>
+                <a:ea typeface="微软雅黑"/>
+              </a:rPr>
+              <a:t>•  隔项交换会把中间那项的变化也卷进来，</a:t>
+            </a:r>
+            <a:r>
+              <a:rPr sz="2000" b="1" i="0">
+                <a:solidFill>
+                  <a:srgbClr val="12395B"/>
+                </a:solidFill>
+                <a:latin typeface="Segoe UI"/>
+                <a:ea typeface="微软雅黑"/>
+              </a:rPr>
+              <a:t>化简不出干净的不等式</a:t>
+            </a:r>
+          </a:p>
+        </p:txBody>
+      </p:sp>
+      <p:sp>
+        <p:nvSpPr>
+          <p:cNvPr id="5" name="TextBox 4"/>
+          <p:cNvSpPr txBox="1"/>
+          <p:nvPr/>
+        </p:nvSpPr>
+        <p:spPr>
+          <a:xfrm>
+            <a:off x="566928" y="6327648"/>
+            <a:ext cx="8229600" cy="310896"/>
+          </a:xfrm>
+          <a:prstGeom prst="rect">
+            <a:avLst/>
+          </a:prstGeom>
+          <a:noFill/>
+        </p:spPr>
+        <p:txBody>
+          <a:bodyPr wrap="square" lIns="0" rIns="0" tIns="0" bIns="0">
+            <a:noAutofit/>
+          </a:bodyPr>
+          <a:lstStyle/>
+          <a:p>
+            <a:pPr algn="l">
+              <a:spcBef>
+                <a:spcPts val="0"/>
+              </a:spcBef>
+              <a:spcAft>
+                <a:spcPts val="0"/>
+              </a:spcAft>
+            </a:pPr>
+            <a:r>
+              <a:rPr sz="1000" b="0" i="0">
+                <a:solidFill>
+                  <a:srgbClr val="6B7582"/>
+                </a:solidFill>
+                <a:latin typeface="Segoe UI"/>
+                <a:ea typeface="微软雅黑"/>
+              </a:rPr>
+              <a:t>计算概论（B） · 第6周 · 闫宏飞 · 2026 Fall</a:t>
+            </a:r>
+          </a:p>
+        </p:txBody>
+      </p:sp>
+      <p:sp>
+        <p:nvSpPr>
+          <p:cNvPr id="6" name="TextBox 5"/>
+          <p:cNvSpPr txBox="1"/>
+          <p:nvPr/>
+        </p:nvSpPr>
+        <p:spPr>
+          <a:xfrm>
+            <a:off x="10710367" y="6327648"/>
+            <a:ext cx="914400" cy="310896"/>
+          </a:xfrm>
+          <a:prstGeom prst="rect">
+            <a:avLst/>
+          </a:prstGeom>
+          <a:noFill/>
+        </p:spPr>
+        <p:txBody>
+          <a:bodyPr wrap="square" lIns="0" rIns="0" tIns="0" bIns="0">
+            <a:noAutofit/>
+          </a:bodyPr>
+          <a:lstStyle/>
+          <a:p>
+            <a:pPr algn="r">
+              <a:spcBef>
+                <a:spcPts val="0"/>
+              </a:spcBef>
+              <a:spcAft>
+                <a:spcPts val="0"/>
+              </a:spcAft>
+            </a:pPr>
+            <a:r>
+              <a:rPr sz="1000" b="0" i="0">
+                <a:solidFill>
+                  <a:srgbClr val="6B7582"/>
+                </a:solidFill>
+                <a:latin typeface="Segoe UI"/>
+                <a:ea typeface="微软雅黑"/>
+              </a:rPr>
+              <a:t>20</a:t>
+            </a:r>
+          </a:p>
+        </p:txBody>
+      </p:sp>
+    </p:spTree>
+  </p:cSld>
+  <p:clrMapOvr>
+    <a:masterClrMapping/>
+  </p:clrMapOvr>
+</p:sld>
+</file>
+
+<file path=ppt/slides/slide21.xml><?xml version="1.0" encoding="utf-8"?>
+<p:sld xmlns:a="http://schemas.openxmlformats.org/drawingml/2006/main" xmlns:p="http://schemas.openxmlformats.org/presentationml/2006/main" xmlns:r="http://schemas.openxmlformats.org/officeDocument/2006/relationships">
+  <p:cSld>
+    <p:spTree>
+      <p:nvGrpSpPr>
+        <p:cNvPr id="1" name=""/>
+        <p:cNvGrpSpPr/>
+        <p:nvPr/>
+      </p:nvGrpSpPr>
+      <p:grpSpPr/>
+      <p:sp>
+        <p:nvSpPr>
+          <p:cNvPr id="2" name="TextBox 1"/>
+          <p:cNvSpPr txBox="1"/>
+          <p:nvPr/>
+        </p:nvSpPr>
+        <p:spPr>
+          <a:xfrm>
+            <a:off x="566928" y="420624"/>
+            <a:ext cx="11057839" cy="548640"/>
+          </a:xfrm>
+          <a:prstGeom prst="rect">
+            <a:avLst/>
+          </a:prstGeom>
+          <a:noFill/>
+        </p:spPr>
+        <p:txBody>
+          <a:bodyPr wrap="square" lIns="0" rIns="0" tIns="0" bIns="0">
+            <a:noAutofit/>
+          </a:bodyPr>
+          <a:lstStyle/>
+          <a:p>
+            <a:pPr algn="l">
+              <a:spcBef>
+                <a:spcPts val="0"/>
+              </a:spcBef>
+              <a:spcAft>
+                <a:spcPts val="0"/>
+              </a:spcAft>
+            </a:pPr>
+            <a:r>
+              <a:rPr sz="2600" b="1" i="0">
+                <a:solidFill>
+                  <a:srgbClr val="12395B"/>
+                </a:solidFill>
+                <a:latin typeface="Segoe UI"/>
+                <a:ea typeface="微软雅黑"/>
+              </a:rPr>
+              <a:t>反过来用：这才是它在考场上的价值</a:t>
+            </a:r>
+          </a:p>
+        </p:txBody>
+      </p:sp>
+      <p:sp>
+        <p:nvSpPr>
+          <p:cNvPr id="3" name="Rectangle 2"/>
+          <p:cNvSpPr/>
+          <p:nvPr/>
+        </p:nvSpPr>
+        <p:spPr>
+          <a:xfrm>
+            <a:off x="566928" y="1060704"/>
+            <a:ext cx="960120" cy="40640"/>
+          </a:xfrm>
+          <a:prstGeom prst="rect">
+            <a:avLst/>
+          </a:prstGeom>
+          <a:solidFill>
+            <a:srgbClr val="E07B39"/>
+          </a:solidFill>
+          <a:ln>
+            <a:noFill/>
+          </a:ln>
+          <a:effectLst/>
+        </p:spPr>
+        <p:style>
+          <a:lnRef idx="1">
+            <a:schemeClr val="accent1"/>
+          </a:lnRef>
+          <a:fillRef idx="3">
+            <a:schemeClr val="accent1"/>
+          </a:fillRef>
+          <a:effectRef idx="2">
+            <a:schemeClr val="accent1"/>
+          </a:effectRef>
+          <a:fontRef idx="minor">
+            <a:schemeClr val="lt1"/>
+          </a:fontRef>
+        </p:style>
+        <p:txBody>
+          <a:bodyPr rtlCol="0" anchor="ctr"/>
+          <a:lstStyle/>
+          <a:p>
+            <a:pPr algn="ctr"/>
+          </a:p>
+        </p:txBody>
+      </p:sp>
+      <p:sp>
+        <p:nvSpPr>
+          <p:cNvPr id="4" name="Rectangle 3"/>
+          <p:cNvSpPr/>
+          <p:nvPr/>
+        </p:nvSpPr>
+        <p:spPr>
+          <a:xfrm>
+            <a:off x="566928" y="2084831"/>
+            <a:ext cx="11057839" cy="2286000"/>
+          </a:xfrm>
+          <a:prstGeom prst="rect">
+            <a:avLst/>
+          </a:prstGeom>
+          <a:solidFill>
+            <a:srgbClr val="F2F4F7"/>
+          </a:solidFill>
+          <a:ln>
+            <a:noFill/>
+          </a:ln>
+          <a:effectLst/>
+        </p:spPr>
+        <p:style>
+          <a:lnRef idx="1">
+            <a:schemeClr val="accent1"/>
+          </a:lnRef>
+          <a:fillRef idx="3">
+            <a:schemeClr val="accent1"/>
+          </a:fillRef>
+          <a:effectRef idx="2">
+            <a:schemeClr val="accent1"/>
+          </a:effectRef>
+          <a:fontRef idx="minor">
+            <a:schemeClr val="lt1"/>
+          </a:fontRef>
+        </p:style>
+        <p:txBody>
+          <a:bodyPr rtlCol="0" anchor="ctr"/>
+          <a:lstStyle/>
+          <a:p>
+            <a:pPr algn="ctr"/>
+          </a:p>
+        </p:txBody>
+      </p:sp>
+      <p:sp>
+        <p:nvSpPr>
+          <p:cNvPr id="5" name="Rectangle 4"/>
+          <p:cNvSpPr/>
+          <p:nvPr/>
+        </p:nvSpPr>
+        <p:spPr>
+          <a:xfrm>
+            <a:off x="566928" y="2084831"/>
+            <a:ext cx="82296" cy="2286000"/>
+          </a:xfrm>
+          <a:prstGeom prst="rect">
+            <a:avLst/>
+          </a:prstGeom>
+          <a:solidFill>
+            <a:srgbClr val="E07B39"/>
+          </a:solidFill>
+          <a:ln>
+            <a:noFill/>
+          </a:ln>
+          <a:effectLst/>
+        </p:spPr>
+        <p:style>
+          <a:lnRef idx="1">
+            <a:schemeClr val="accent1"/>
+          </a:lnRef>
+          <a:fillRef idx="3">
+            <a:schemeClr val="accent1"/>
+          </a:fillRef>
+          <a:effectRef idx="2">
+            <a:schemeClr val="accent1"/>
+          </a:effectRef>
+          <a:fontRef idx="minor">
+            <a:schemeClr val="lt1"/>
+          </a:fontRef>
+        </p:style>
+        <p:txBody>
+          <a:bodyPr rtlCol="0" anchor="ctr"/>
+          <a:lstStyle/>
+          <a:p>
+            <a:pPr algn="ctr"/>
+          </a:p>
+        </p:txBody>
+      </p:sp>
+      <p:sp>
+        <p:nvSpPr>
+          <p:cNvPr id="6" name="TextBox 5"/>
+          <p:cNvSpPr txBox="1"/>
+          <p:nvPr/>
+        </p:nvSpPr>
+        <p:spPr>
+          <a:xfrm>
+            <a:off x="1069848" y="2377440"/>
+            <a:ext cx="10051999" cy="1737360"/>
+          </a:xfrm>
+          <a:prstGeom prst="rect">
+            <a:avLst/>
+          </a:prstGeom>
+          <a:noFill/>
+        </p:spPr>
+        <p:txBody>
+          <a:bodyPr wrap="square" lIns="0" rIns="0" tIns="0" bIns="0">
+            <a:noAutofit/>
+          </a:bodyPr>
+          <a:lstStyle/>
+          <a:p>
+            <a:pPr algn="l">
+              <a:lnSpc>
+                <a:spcPct val="145000"/>
+              </a:lnSpc>
+              <a:spcBef>
+                <a:spcPts val="0"/>
+              </a:spcBef>
+              <a:spcAft>
+                <a:spcPts val="0"/>
+              </a:spcAft>
+            </a:pPr>
+            <a:r>
+              <a:rPr sz="2200" b="1" i="0">
+                <a:solidFill>
+                  <a:srgbClr val="12395B"/>
+                </a:solidFill>
+                <a:latin typeface="Segoe UI"/>
+                <a:ea typeface="微软雅黑"/>
+              </a:rPr>
+              <a:t>设相邻两项 a、b，写出「a 在前」与「b 在前」的代价，令前者不劣 —— 化简出来的不等式就是排序键。</a:t>
+            </a:r>
+          </a:p>
+        </p:txBody>
+      </p:sp>
+      <p:sp>
+        <p:nvSpPr>
+          <p:cNvPr id="7" name="TextBox 6"/>
+          <p:cNvSpPr txBox="1"/>
+          <p:nvPr/>
+        </p:nvSpPr>
+        <p:spPr>
+          <a:xfrm>
+            <a:off x="566928" y="6327648"/>
+            <a:ext cx="8229600" cy="310896"/>
+          </a:xfrm>
+          <a:prstGeom prst="rect">
+            <a:avLst/>
+          </a:prstGeom>
+          <a:noFill/>
+        </p:spPr>
+        <p:txBody>
+          <a:bodyPr wrap="square" lIns="0" rIns="0" tIns="0" bIns="0">
+            <a:noAutofit/>
+          </a:bodyPr>
+          <a:lstStyle/>
+          <a:p>
+            <a:pPr algn="l">
+              <a:spcBef>
+                <a:spcPts val="0"/>
+              </a:spcBef>
+              <a:spcAft>
+                <a:spcPts val="0"/>
+              </a:spcAft>
+            </a:pPr>
+            <a:r>
+              <a:rPr sz="1000" b="0" i="0">
+                <a:solidFill>
+                  <a:srgbClr val="6B7582"/>
+                </a:solidFill>
+                <a:latin typeface="Segoe UI"/>
+                <a:ea typeface="微软雅黑"/>
+              </a:rPr>
+              <a:t>计算概论（B） · 第6周 · 闫宏飞 · 2026 Fall</a:t>
+            </a:r>
+          </a:p>
+        </p:txBody>
+      </p:sp>
+      <p:sp>
+        <p:nvSpPr>
+          <p:cNvPr id="8" name="TextBox 7"/>
+          <p:cNvSpPr txBox="1"/>
+          <p:nvPr/>
+        </p:nvSpPr>
+        <p:spPr>
+          <a:xfrm>
+            <a:off x="10710367" y="6327648"/>
+            <a:ext cx="914400" cy="310896"/>
+          </a:xfrm>
+          <a:prstGeom prst="rect">
+            <a:avLst/>
+          </a:prstGeom>
+          <a:noFill/>
+        </p:spPr>
+        <p:txBody>
+          <a:bodyPr wrap="square" lIns="0" rIns="0" tIns="0" bIns="0">
+            <a:noAutofit/>
+          </a:bodyPr>
+          <a:lstStyle/>
+          <a:p>
+            <a:pPr algn="r">
+              <a:spcBef>
+                <a:spcPts val="0"/>
+              </a:spcBef>
+              <a:spcAft>
+                <a:spcPts val="0"/>
+              </a:spcAft>
+            </a:pPr>
+            <a:r>
+              <a:rPr sz="1000" b="0" i="0">
+                <a:solidFill>
+                  <a:srgbClr val="6B7582"/>
+                </a:solidFill>
+                <a:latin typeface="Segoe UI"/>
+                <a:ea typeface="微软雅黑"/>
+              </a:rPr>
+              <a:t>21</a:t>
+            </a:r>
+          </a:p>
+        </p:txBody>
+      </p:sp>
+    </p:spTree>
+  </p:cSld>
+  <p:clrMapOvr>
+    <a:masterClrMapping/>
+  </p:clrMapOvr>
+</p:sld>
+</file>
+
+<file path=ppt/slides/slide22.xml><?xml version="1.0" encoding="utf-8"?>
+<p:sld xmlns:a="http://schemas.openxmlformats.org/drawingml/2006/main" xmlns:p="http://schemas.openxmlformats.org/presentationml/2006/main" xmlns:r="http://schemas.openxmlformats.org/officeDocument/2006/relationships">
+  <p:cSld>
+    <p:spTree>
+      <p:nvGrpSpPr>
+        <p:cNvPr id="1" name=""/>
+        <p:cNvGrpSpPr/>
+        <p:nvPr/>
+      </p:nvGrpSpPr>
+      <p:grpSpPr/>
+      <p:sp>
+        <p:nvSpPr>
+          <p:cNvPr id="2" name="TextBox 1"/>
+          <p:cNvSpPr txBox="1"/>
+          <p:nvPr/>
+        </p:nvSpPr>
+        <p:spPr>
+          <a:xfrm>
+            <a:off x="566928" y="420624"/>
+            <a:ext cx="11057839" cy="548640"/>
+          </a:xfrm>
+          <a:prstGeom prst="rect">
+            <a:avLst/>
+          </a:prstGeom>
+          <a:noFill/>
+        </p:spPr>
+        <p:txBody>
+          <a:bodyPr wrap="square" lIns="0" rIns="0" tIns="0" bIns="0">
+            <a:noAutofit/>
+          </a:bodyPr>
+          <a:lstStyle/>
+          <a:p>
+            <a:pPr algn="l">
+              <a:spcBef>
+                <a:spcPts val="0"/>
+              </a:spcBef>
+              <a:spcAft>
+                <a:spcPts val="0"/>
+              </a:spcAft>
+            </a:pPr>
+            <a:r>
+              <a:rPr sz="2600" b="1" i="0">
+                <a:solidFill>
+                  <a:srgbClr val="12395B"/>
+                </a:solidFill>
+                <a:latin typeface="Segoe UI"/>
+                <a:ea typeface="微软雅黑"/>
+              </a:rPr>
+              <a:t>12559 的排序键是这么推出来的</a:t>
+            </a:r>
+          </a:p>
+        </p:txBody>
+      </p:sp>
+      <p:sp>
+        <p:nvSpPr>
+          <p:cNvPr id="3" name="Rectangle 2"/>
+          <p:cNvSpPr/>
+          <p:nvPr/>
+        </p:nvSpPr>
+        <p:spPr>
+          <a:xfrm>
+            <a:off x="566928" y="1060704"/>
+            <a:ext cx="960120" cy="40640"/>
+          </a:xfrm>
+          <a:prstGeom prst="rect">
+            <a:avLst/>
+          </a:prstGeom>
+          <a:solidFill>
+            <a:srgbClr val="E07B39"/>
+          </a:solidFill>
+          <a:ln>
+            <a:noFill/>
+          </a:ln>
+          <a:effectLst/>
+        </p:spPr>
+        <p:style>
+          <a:lnRef idx="1">
+            <a:schemeClr val="accent1"/>
+          </a:lnRef>
+          <a:fillRef idx="3">
+            <a:schemeClr val="accent1"/>
+          </a:fillRef>
+          <a:effectRef idx="2">
+            <a:schemeClr val="accent1"/>
+          </a:effectRef>
+          <a:fontRef idx="minor">
+            <a:schemeClr val="lt1"/>
+          </a:fontRef>
+        </p:style>
+        <p:txBody>
+          <a:bodyPr rtlCol="0" anchor="ctr"/>
+          <a:lstStyle/>
+          <a:p>
+            <a:pPr algn="ctr"/>
+          </a:p>
+        </p:txBody>
+      </p:sp>
+      <p:sp>
+        <p:nvSpPr>
+          <p:cNvPr id="4" name="Rectangle 3"/>
+          <p:cNvSpPr/>
+          <p:nvPr/>
+        </p:nvSpPr>
+        <p:spPr>
+          <a:xfrm>
+            <a:off x="566928" y="1298448"/>
+            <a:ext cx="11057839" cy="4443983"/>
+          </a:xfrm>
+          <a:prstGeom prst="rect">
+            <a:avLst/>
+          </a:prstGeom>
+          <a:solidFill>
+            <a:srgbClr val="F6F7F9"/>
+          </a:solidFill>
+          <a:ln w="9525">
+            <a:solidFill>
+              <a:srgbClr val="D6DCE4"/>
+            </a:solidFill>
+          </a:ln>
+          <a:effectLst/>
+        </p:spPr>
+        <p:style>
+          <a:lnRef idx="1">
+            <a:schemeClr val="accent1"/>
+          </a:lnRef>
+          <a:fillRef idx="3">
+            <a:schemeClr val="accent1"/>
+          </a:fillRef>
+          <a:effectRef idx="2">
+            <a:schemeClr val="accent1"/>
+          </a:effectRef>
+          <a:fontRef idx="minor">
+            <a:schemeClr val="lt1"/>
+          </a:fontRef>
+        </p:style>
+        <p:txBody>
+          <a:bodyPr rtlCol="0" anchor="ctr"/>
+          <a:lstStyle/>
+          <a:p>
+            <a:pPr algn="ctr"/>
+          </a:p>
+        </p:txBody>
+      </p:sp>
+      <p:sp>
+        <p:nvSpPr>
+          <p:cNvPr id="5" name="TextBox 4"/>
+          <p:cNvSpPr txBox="1"/>
+          <p:nvPr/>
+        </p:nvSpPr>
+        <p:spPr>
+          <a:xfrm>
+            <a:off x="822960" y="1399032"/>
+            <a:ext cx="10545775" cy="4242815"/>
+          </a:xfrm>
+          <a:prstGeom prst="rect">
+            <a:avLst/>
+          </a:prstGeom>
+          <a:noFill/>
+        </p:spPr>
+        <p:txBody>
+          <a:bodyPr wrap="square" lIns="0" rIns="0" tIns="0" bIns="0">
+            <a:noAutofit/>
+          </a:bodyPr>
+          <a:lstStyle/>
+          <a:p>
+            <a:pPr algn="l">
+              <a:lnSpc>
+                <a:spcPts val="1425"/>
+              </a:lnSpc>
+              <a:spcBef>
+                <a:spcPts val="0"/>
+              </a:spcBef>
+              <a:spcAft>
+                <a:spcPts val="0"/>
+              </a:spcAft>
+            </a:pPr>
+            <a:r>
+              <a:rPr sz="1096" b="0" i="0">
+                <a:solidFill>
+                  <a:srgbClr val="242A33"/>
+                </a:solidFill>
+                <a:latin typeface="Consolas"/>
+                <a:ea typeface="Consolas"/>
+              </a:rPr>
+              <a:t># a、b 相邻交换只改变拼接串里那一段，</a:t>
+            </a:r>
+          </a:p>
+          <a:p>
+            <a:pPr algn="l">
+              <a:lnSpc>
+                <a:spcPts val="1425"/>
+              </a:lnSpc>
+              <a:spcBef>
+                <a:spcPts val="0"/>
+              </a:spcBef>
+              <a:spcAft>
+                <a:spcPts val="0"/>
+              </a:spcAft>
+            </a:pPr>
+            <a:r>
+              <a:rPr sz="1096" b="0" i="0">
+                <a:solidFill>
+                  <a:srgbClr val="242A33"/>
+                </a:solidFill>
+                <a:latin typeface="Consolas"/>
+                <a:ea typeface="Consolas"/>
+              </a:rPr>
+              <a:t># 而 a+b 与 b+a 等长 =&gt; 整串比较退化成这两段比较</a:t>
+            </a:r>
+          </a:p>
+          <a:p>
+            <a:pPr algn="l">
+              <a:lnSpc>
+                <a:spcPts val="1425"/>
+              </a:lnSpc>
+              <a:spcBef>
+                <a:spcPts val="0"/>
+              </a:spcBef>
+              <a:spcAft>
+                <a:spcPts val="0"/>
+              </a:spcAft>
+            </a:pPr>
+            <a:r>
+              <a:rPr sz="1096" b="0" i="0">
+                <a:solidFill>
+                  <a:srgbClr val="242A33"/>
+                </a:solidFill>
+                <a:latin typeface="Consolas"/>
+                <a:ea typeface="Consolas"/>
+              </a:rPr>
+              <a:t>#   a 在前 -&gt; a+b        b 在前 -&gt; b+a</a:t>
+            </a:r>
+          </a:p>
+          <a:p>
+            <a:pPr algn="l">
+              <a:lnSpc>
+                <a:spcPts val="1425"/>
+              </a:lnSpc>
+              <a:spcBef>
+                <a:spcPts val="0"/>
+              </a:spcBef>
+              <a:spcAft>
+                <a:spcPts val="0"/>
+              </a:spcAft>
+            </a:pPr>
+            <a:r>
+              <a:rPr sz="1096" b="0" i="0">
+                <a:solidFill>
+                  <a:srgbClr val="242A33"/>
+                </a:solidFill>
+                <a:latin typeface="Consolas"/>
+                <a:ea typeface="Consolas"/>
+              </a:rPr>
+              <a:t># 所以：a 应排在 b 前面  &lt;=&gt;  a + b &gt; b + a</a:t>
+            </a:r>
+          </a:p>
+          <a:p>
+            <a:pPr algn="l">
+              <a:lnSpc>
+                <a:spcPts val="1425"/>
+              </a:lnSpc>
+              <a:spcBef>
+                <a:spcPts val="0"/>
+              </a:spcBef>
+              <a:spcAft>
+                <a:spcPts val="0"/>
+              </a:spcAft>
+            </a:pPr>
+            <a:r>
+              <a:rPr sz="1096" b="0" i="0">
+                <a:solidFill>
+                  <a:srgbClr val="242A33"/>
+                </a:solidFill>
+                <a:latin typeface="Consolas"/>
+                <a:ea typeface="Consolas"/>
+              </a:rPr>
+              <a:t>import functools</a:t>
+            </a:r>
+          </a:p>
+          <a:p>
+            <a:pPr algn="l">
+              <a:lnSpc>
+                <a:spcPts val="1425"/>
+              </a:lnSpc>
+              <a:spcBef>
+                <a:spcPts val="0"/>
+              </a:spcBef>
+              <a:spcAft>
+                <a:spcPts val="0"/>
+              </a:spcAft>
+            </a:pPr>
+            <a:r>
+              <a:rPr sz="1096" b="0" i="0">
+                <a:solidFill>
+                  <a:srgbClr val="242A33"/>
+                </a:solidFill>
+                <a:latin typeface="Consolas"/>
+                <a:ea typeface="Consolas"/>
+              </a:rPr>
+              <a:t>import itertools</a:t>
+            </a:r>
+          </a:p>
+          <a:p>
+            <a:pPr algn="l">
+              <a:lnSpc>
+                <a:spcPts val="1425"/>
+              </a:lnSpc>
+              <a:spcBef>
+                <a:spcPts val="0"/>
+              </a:spcBef>
+              <a:spcAft>
+                <a:spcPts val="0"/>
+              </a:spcAft>
+            </a:pPr>
+            <a:r>
+              <a:rPr sz="1096" b="0" i="0">
+                <a:solidFill>
+                  <a:srgbClr val="242A33"/>
+                </a:solidFill>
+                <a:latin typeface="Consolas"/>
+                <a:ea typeface="Consolas"/>
+              </a:rPr>
+              <a:t>import random</a:t>
+            </a:r>
+          </a:p>
+          <a:p>
+            <a:pPr algn="l">
+              <a:lnSpc>
+                <a:spcPts val="1425"/>
+              </a:lnSpc>
+              <a:spcBef>
+                <a:spcPts val="0"/>
+              </a:spcBef>
+              <a:spcAft>
+                <a:spcPts val="0"/>
+              </a:spcAft>
+            </a:pPr>
+            <a:r>
+              <a:rPr sz="1096" b="0" i="0">
+                <a:solidFill>
+                  <a:srgbClr val="242A33"/>
+                </a:solidFill>
+                <a:latin typeface="Consolas"/>
+                <a:ea typeface="Consolas"/>
+              </a:rPr>
+              <a:t> </a:t>
+            </a:r>
+          </a:p>
+          <a:p>
+            <a:pPr algn="l">
+              <a:lnSpc>
+                <a:spcPts val="1425"/>
+              </a:lnSpc>
+              <a:spcBef>
+                <a:spcPts val="0"/>
+              </a:spcBef>
+              <a:spcAft>
+                <a:spcPts val="0"/>
+              </a:spcAft>
+            </a:pPr>
+            <a:r>
+              <a:rPr sz="1096" b="0" i="0">
+                <a:solidFill>
+                  <a:srgbClr val="242A33"/>
+                </a:solidFill>
+                <a:latin typeface="Consolas"/>
+                <a:ea typeface="Consolas"/>
+              </a:rPr>
+              <a:t> </a:t>
+            </a:r>
+          </a:p>
+          <a:p>
+            <a:pPr algn="l">
+              <a:lnSpc>
+                <a:spcPts val="1425"/>
+              </a:lnSpc>
+              <a:spcBef>
+                <a:spcPts val="0"/>
+              </a:spcBef>
+              <a:spcAft>
+                <a:spcPts val="0"/>
+              </a:spcAft>
+            </a:pPr>
+            <a:r>
+              <a:rPr sz="1096" b="0" i="0">
+                <a:solidFill>
+                  <a:srgbClr val="242A33"/>
+                </a:solidFill>
+                <a:latin typeface="Consolas"/>
+                <a:ea typeface="Consolas"/>
+              </a:rPr>
+              <a:t>def by_rule(strs):</a:t>
+            </a:r>
+          </a:p>
+          <a:p>
+            <a:pPr algn="l">
+              <a:lnSpc>
+                <a:spcPts val="1425"/>
+              </a:lnSpc>
+              <a:spcBef>
+                <a:spcPts val="0"/>
+              </a:spcBef>
+              <a:spcAft>
+                <a:spcPts val="0"/>
+              </a:spcAft>
+            </a:pPr>
+            <a:r>
+              <a:rPr sz="1096" b="0" i="0">
+                <a:solidFill>
+                  <a:srgbClr val="242A33"/>
+                </a:solidFill>
+                <a:latin typeface="Consolas"/>
+                <a:ea typeface="Consolas"/>
+              </a:rPr>
+              <a:t>    cmp = lambda x, y: -1 if x + y &gt; y + x else (1 if x + y &lt; y + x else 0)</a:t>
+            </a:r>
+          </a:p>
+          <a:p>
+            <a:pPr algn="l">
+              <a:lnSpc>
+                <a:spcPts val="1425"/>
+              </a:lnSpc>
+              <a:spcBef>
+                <a:spcPts val="0"/>
+              </a:spcBef>
+              <a:spcAft>
+                <a:spcPts val="0"/>
+              </a:spcAft>
+            </a:pPr>
+            <a:r>
+              <a:rPr sz="1096" b="0" i="0">
+                <a:solidFill>
+                  <a:srgbClr val="242A33"/>
+                </a:solidFill>
+                <a:latin typeface="Consolas"/>
+                <a:ea typeface="Consolas"/>
+              </a:rPr>
+              <a:t>    return ''.join(sorted(strs, key=functools.cmp_to_key(cmp)))</a:t>
+            </a:r>
+          </a:p>
+          <a:p>
+            <a:pPr algn="l">
+              <a:lnSpc>
+                <a:spcPts val="1425"/>
+              </a:lnSpc>
+              <a:spcBef>
+                <a:spcPts val="0"/>
+              </a:spcBef>
+              <a:spcAft>
+                <a:spcPts val="0"/>
+              </a:spcAft>
+            </a:pPr>
+            <a:r>
+              <a:rPr sz="1096" b="0" i="0">
+                <a:solidFill>
+                  <a:srgbClr val="242A33"/>
+                </a:solidFill>
+                <a:latin typeface="Consolas"/>
+                <a:ea typeface="Consolas"/>
+              </a:rPr>
+              <a:t> </a:t>
+            </a:r>
+          </a:p>
+          <a:p>
+            <a:pPr algn="l">
+              <a:lnSpc>
+                <a:spcPts val="1425"/>
+              </a:lnSpc>
+              <a:spcBef>
+                <a:spcPts val="0"/>
+              </a:spcBef>
+              <a:spcAft>
+                <a:spcPts val="0"/>
+              </a:spcAft>
+            </a:pPr>
+            <a:r>
+              <a:rPr sz="1096" b="0" i="0">
+                <a:solidFill>
+                  <a:srgbClr val="242A33"/>
+                </a:solidFill>
+                <a:latin typeface="Consolas"/>
+                <a:ea typeface="Consolas"/>
+              </a:rPr>
+              <a:t> </a:t>
+            </a:r>
+          </a:p>
+          <a:p>
+            <a:pPr algn="l">
+              <a:lnSpc>
+                <a:spcPts val="1425"/>
+              </a:lnSpc>
+              <a:spcBef>
+                <a:spcPts val="0"/>
+              </a:spcBef>
+              <a:spcAft>
+                <a:spcPts val="0"/>
+              </a:spcAft>
+            </a:pPr>
+            <a:r>
+              <a:rPr sz="1096" b="0" i="0">
+                <a:solidFill>
+                  <a:srgbClr val="242A33"/>
+                </a:solidFill>
+                <a:latin typeface="Consolas"/>
+                <a:ea typeface="Consolas"/>
+              </a:rPr>
+              <a:t>nums = ["3", "30", "34", "5", "9"]</a:t>
+            </a:r>
+          </a:p>
+          <a:p>
+            <a:pPr algn="l">
+              <a:lnSpc>
+                <a:spcPts val="1425"/>
+              </a:lnSpc>
+              <a:spcBef>
+                <a:spcPts val="0"/>
+              </a:spcBef>
+              <a:spcAft>
+                <a:spcPts val="0"/>
+              </a:spcAft>
+            </a:pPr>
+            <a:r>
+              <a:rPr sz="1096" b="0" i="0">
+                <a:solidFill>
+                  <a:srgbClr val="242A33"/>
+                </a:solidFill>
+                <a:latin typeface="Consolas"/>
+                <a:ea typeface="Consolas"/>
+              </a:rPr>
+              <a:t>print(by_rule(nums))                                    # 9534330</a:t>
+            </a:r>
+          </a:p>
+          <a:p>
+            <a:pPr algn="l">
+              <a:lnSpc>
+                <a:spcPts val="1425"/>
+              </a:lnSpc>
+              <a:spcBef>
+                <a:spcPts val="0"/>
+              </a:spcBef>
+              <a:spcAft>
+                <a:spcPts val="0"/>
+              </a:spcAft>
+            </a:pPr>
+            <a:r>
+              <a:rPr sz="1096" b="0" i="0">
+                <a:solidFill>
+                  <a:srgbClr val="242A33"/>
+                </a:solidFill>
+                <a:latin typeface="Consolas"/>
+                <a:ea typeface="Consolas"/>
+              </a:rPr>
+              <a:t>print(''.join(sorted(nums, reverse=True)))              # 9534303  字典序，错</a:t>
+            </a:r>
+          </a:p>
+          <a:p>
+            <a:pPr algn="l">
+              <a:lnSpc>
+                <a:spcPts val="1425"/>
+              </a:lnSpc>
+              <a:spcBef>
+                <a:spcPts val="0"/>
+              </a:spcBef>
+              <a:spcAft>
+                <a:spcPts val="0"/>
+              </a:spcAft>
+            </a:pPr>
+            <a:r>
+              <a:rPr sz="1096" b="0" i="0">
+                <a:solidFill>
+                  <a:srgbClr val="242A33"/>
+                </a:solidFill>
+                <a:latin typeface="Consolas"/>
+                <a:ea typeface="Consolas"/>
+              </a:rPr>
+              <a:t>print(''.join(sorted(nums, key=int, reverse=True)))     # 3430953  数值序，错</a:t>
+            </a:r>
+          </a:p>
+          <a:p>
+            <a:pPr algn="l">
+              <a:lnSpc>
+                <a:spcPts val="1425"/>
+              </a:lnSpc>
+              <a:spcBef>
+                <a:spcPts val="0"/>
+              </a:spcBef>
+              <a:spcAft>
+                <a:spcPts val="0"/>
+              </a:spcAft>
+            </a:pPr>
+            <a:r>
+              <a:rPr sz="1096" b="0" i="0">
+                <a:solidFill>
+                  <a:srgbClr val="242A33"/>
+                </a:solidFill>
+                <a:latin typeface="Consolas"/>
+                <a:ea typeface="Consolas"/>
+              </a:rPr>
+              <a:t> </a:t>
+            </a:r>
+          </a:p>
+          <a:p>
+            <a:pPr algn="l">
+              <a:lnSpc>
+                <a:spcPts val="1425"/>
+              </a:lnSpc>
+              <a:spcBef>
+                <a:spcPts val="0"/>
+              </a:spcBef>
+              <a:spcAft>
+                <a:spcPts val="0"/>
+              </a:spcAft>
+            </a:pPr>
+            <a:r>
+              <a:rPr sz="1096" b="0" i="0">
+                <a:solidFill>
+                  <a:srgbClr val="242A33"/>
+                </a:solidFill>
+                <a:latin typeface="Consolas"/>
+                <a:ea typeface="Consolas"/>
+              </a:rPr>
+              <a:t>random.seed(6)</a:t>
+            </a:r>
+          </a:p>
+          <a:p>
+            <a:pPr algn="l">
+              <a:lnSpc>
+                <a:spcPts val="1425"/>
+              </a:lnSpc>
+              <a:spcBef>
+                <a:spcPts val="0"/>
+              </a:spcBef>
+              <a:spcAft>
+                <a:spcPts val="0"/>
+              </a:spcAft>
+            </a:pPr>
+            <a:r>
+              <a:rPr sz="1096" b="0" i="0">
+                <a:solidFill>
+                  <a:srgbClr val="242A33"/>
+                </a:solidFill>
+                <a:latin typeface="Consolas"/>
+                <a:ea typeface="Consolas"/>
+              </a:rPr>
+              <a:t>for _ in range(300):                                    # 推完必须对拍</a:t>
+            </a:r>
+          </a:p>
+          <a:p>
+            <a:pPr algn="l">
+              <a:lnSpc>
+                <a:spcPts val="1425"/>
+              </a:lnSpc>
+              <a:spcBef>
+                <a:spcPts val="0"/>
+              </a:spcBef>
+              <a:spcAft>
+                <a:spcPts val="0"/>
+              </a:spcAft>
+            </a:pPr>
+            <a:r>
+              <a:rPr sz="1096" b="0" i="0">
+                <a:solidFill>
+                  <a:srgbClr val="242A33"/>
+                </a:solidFill>
+                <a:latin typeface="Consolas"/>
+                <a:ea typeface="Consolas"/>
+              </a:rPr>
+              <a:t>    t = [str(random.randint(0, 99)) for _ in range(random.randint(2, 6))]</a:t>
+            </a:r>
+          </a:p>
+          <a:p>
+            <a:pPr algn="l">
+              <a:lnSpc>
+                <a:spcPts val="1425"/>
+              </a:lnSpc>
+              <a:spcBef>
+                <a:spcPts val="0"/>
+              </a:spcBef>
+              <a:spcAft>
+                <a:spcPts val="0"/>
+              </a:spcAft>
+            </a:pPr>
+            <a:r>
+              <a:rPr sz="1096" b="0" i="0">
+                <a:solidFill>
+                  <a:srgbClr val="242A33"/>
+                </a:solidFill>
+                <a:latin typeface="Consolas"/>
+                <a:ea typeface="Consolas"/>
+              </a:rPr>
+              <a:t>    assert by_rule(t) == max(''.join(p) for p in itertools.permutations(t))</a:t>
+            </a:r>
+          </a:p>
+        </p:txBody>
+      </p:sp>
+      <p:sp>
+        <p:nvSpPr>
+          <p:cNvPr id="6" name="TextBox 5"/>
+          <p:cNvSpPr txBox="1"/>
+          <p:nvPr/>
+        </p:nvSpPr>
+        <p:spPr>
+          <a:xfrm>
+            <a:off x="566928" y="5861303"/>
+            <a:ext cx="11057839" cy="329184"/>
+          </a:xfrm>
+          <a:prstGeom prst="rect">
+            <a:avLst/>
+          </a:prstGeom>
+          <a:noFill/>
+        </p:spPr>
+        <p:txBody>
+          <a:bodyPr wrap="square" lIns="0" rIns="0" tIns="0" bIns="0">
+            <a:noAutofit/>
+          </a:bodyPr>
+          <a:lstStyle/>
+          <a:p>
+            <a:pPr algn="l">
+              <a:spcBef>
+                <a:spcPts val="0"/>
+              </a:spcBef>
+              <a:spcAft>
+                <a:spcPts val="0"/>
+              </a:spcAft>
+            </a:pPr>
+            <a:r>
+              <a:rPr sz="1300" b="0" i="0">
+                <a:solidFill>
+                  <a:srgbClr val="6B7582"/>
+                </a:solidFill>
+                <a:latin typeface="Segoe UI"/>
+                <a:ea typeface="微软雅黑"/>
+              </a:rPr>
+              <a:t>推导会出错，对拍不会 —— 300 组随机数据与全排列暴力逐组一致</a:t>
+            </a:r>
+          </a:p>
+        </p:txBody>
+      </p:sp>
+      <p:sp>
+        <p:nvSpPr>
+          <p:cNvPr id="7" name="TextBox 6"/>
+          <p:cNvSpPr txBox="1"/>
+          <p:nvPr/>
+        </p:nvSpPr>
+        <p:spPr>
+          <a:xfrm>
+            <a:off x="566928" y="6327648"/>
+            <a:ext cx="8229600" cy="310896"/>
+          </a:xfrm>
+          <a:prstGeom prst="rect">
+            <a:avLst/>
+          </a:prstGeom>
+          <a:noFill/>
+        </p:spPr>
+        <p:txBody>
+          <a:bodyPr wrap="square" lIns="0" rIns="0" tIns="0" bIns="0">
+            <a:noAutofit/>
+          </a:bodyPr>
+          <a:lstStyle/>
+          <a:p>
+            <a:pPr algn="l">
+              <a:spcBef>
+                <a:spcPts val="0"/>
+              </a:spcBef>
+              <a:spcAft>
+                <a:spcPts val="0"/>
+              </a:spcAft>
+            </a:pPr>
+            <a:r>
+              <a:rPr sz="1000" b="0" i="0">
+                <a:solidFill>
+                  <a:srgbClr val="6B7582"/>
+                </a:solidFill>
+                <a:latin typeface="Segoe UI"/>
+                <a:ea typeface="微软雅黑"/>
+              </a:rPr>
+              <a:t>计算概论（B） · 第6周 · 闫宏飞 · 2026 Fall</a:t>
+            </a:r>
+          </a:p>
+        </p:txBody>
+      </p:sp>
+      <p:sp>
+        <p:nvSpPr>
+          <p:cNvPr id="8" name="TextBox 7"/>
+          <p:cNvSpPr txBox="1"/>
+          <p:nvPr/>
+        </p:nvSpPr>
+        <p:spPr>
+          <a:xfrm>
+            <a:off x="10710367" y="6327648"/>
+            <a:ext cx="914400" cy="310896"/>
+          </a:xfrm>
+          <a:prstGeom prst="rect">
+            <a:avLst/>
+          </a:prstGeom>
+          <a:noFill/>
+        </p:spPr>
+        <p:txBody>
+          <a:bodyPr wrap="square" lIns="0" rIns="0" tIns="0" bIns="0">
+            <a:noAutofit/>
+          </a:bodyPr>
+          <a:lstStyle/>
+          <a:p>
+            <a:pPr algn="r">
+              <a:spcBef>
+                <a:spcPts val="0"/>
+              </a:spcBef>
+              <a:spcAft>
+                <a:spcPts val="0"/>
+              </a:spcAft>
+            </a:pPr>
+            <a:r>
+              <a:rPr sz="1000" b="0" i="0">
+                <a:solidFill>
+                  <a:srgbClr val="6B7582"/>
+                </a:solidFill>
+                <a:latin typeface="Segoe UI"/>
+                <a:ea typeface="微软雅黑"/>
+              </a:rPr>
+              <a:t>22</a:t>
+            </a:r>
+          </a:p>
+        </p:txBody>
+      </p:sp>
+    </p:spTree>
+  </p:cSld>
+  <p:clrMapOvr>
+    <a:masterClrMapping/>
+  </p:clrMapOvr>
+</p:sld>
+</file>
+
+<file path=ppt/slides/slide23.xml><?xml version="1.0" encoding="utf-8"?>
+<p:sld xmlns:a="http://schemas.openxmlformats.org/drawingml/2006/main" xmlns:p="http://schemas.openxmlformats.org/presentationml/2006/main" xmlns:r="http://schemas.openxmlformats.org/officeDocument/2006/relationships">
+  <p:cSld>
+    <p:spTree>
+      <p:nvGrpSpPr>
+        <p:cNvPr id="1" name=""/>
+        <p:cNvGrpSpPr/>
+        <p:nvPr/>
+      </p:nvGrpSpPr>
+      <p:grpSpPr/>
+      <p:sp>
+        <p:nvSpPr>
+          <p:cNvPr id="2" name="TextBox 1"/>
+          <p:cNvSpPr txBox="1"/>
+          <p:nvPr/>
+        </p:nvSpPr>
+        <p:spPr>
+          <a:xfrm>
+            <a:off x="566928" y="420624"/>
+            <a:ext cx="11057839" cy="548640"/>
+          </a:xfrm>
+          <a:prstGeom prst="rect">
+            <a:avLst/>
+          </a:prstGeom>
+          <a:noFill/>
+        </p:spPr>
+        <p:txBody>
+          <a:bodyPr wrap="square" lIns="0" rIns="0" tIns="0" bIns="0">
+            <a:noAutofit/>
+          </a:bodyPr>
+          <a:lstStyle/>
+          <a:p>
+            <a:pPr algn="l">
+              <a:spcBef>
+                <a:spcPts val="0"/>
+              </a:spcBef>
+              <a:spcAft>
+                <a:spcPts val="0"/>
+              </a:spcAft>
+            </a:pPr>
+            <a:r>
+              <a:rPr sz="2600" b="1" i="0">
+                <a:solidFill>
+                  <a:srgbClr val="12395B"/>
+                </a:solidFill>
+                <a:latin typeface="Segoe UI"/>
+                <a:ea typeface="微软雅黑"/>
+              </a:rPr>
+              <a:t>两种形态，别混</a:t>
+            </a:r>
+          </a:p>
+        </p:txBody>
+      </p:sp>
+      <p:sp>
+        <p:nvSpPr>
+          <p:cNvPr id="3" name="Rectangle 2"/>
+          <p:cNvSpPr/>
+          <p:nvPr/>
+        </p:nvSpPr>
+        <p:spPr>
+          <a:xfrm>
+            <a:off x="566928" y="1060704"/>
+            <a:ext cx="960120" cy="40640"/>
+          </a:xfrm>
+          <a:prstGeom prst="rect">
+            <a:avLst/>
+          </a:prstGeom>
+          <a:solidFill>
+            <a:srgbClr val="E07B39"/>
+          </a:solidFill>
+          <a:ln>
+            <a:noFill/>
+          </a:ln>
+          <a:effectLst/>
+        </p:spPr>
+        <p:style>
+          <a:lnRef idx="1">
+            <a:schemeClr val="accent1"/>
+          </a:lnRef>
+          <a:fillRef idx="3">
+            <a:schemeClr val="accent1"/>
+          </a:fillRef>
+          <a:effectRef idx="2">
+            <a:schemeClr val="accent1"/>
+          </a:effectRef>
+          <a:fontRef idx="minor">
+            <a:schemeClr val="lt1"/>
+          </a:fontRef>
+        </p:style>
+        <p:txBody>
+          <a:bodyPr rtlCol="0" anchor="ctr"/>
+          <a:lstStyle/>
+          <a:p>
+            <a:pPr algn="ctr"/>
+          </a:p>
+        </p:txBody>
+      </p:sp>
+      <p:graphicFrame>
+        <p:nvGraphicFramePr>
+          <p:cNvPr id="4" name="Table 3"/>
+          <p:cNvGraphicFramePr>
+            <a:graphicFrameLocks noGrp="1"/>
+          </p:cNvGraphicFramePr>
+          <p:nvPr/>
+        </p:nvGraphicFramePr>
+        <p:xfrm>
+          <a:off x="566928" y="1298448"/>
+          <a:ext cx="11057837" cy="1318260"/>
+        </p:xfrm>
+        <a:graphic>
+          <a:graphicData uri="http://schemas.openxmlformats.org/drawingml/2006/table">
+            <a:tbl>
+              <a:tblPr firstRow="1" bandRow="1">
+                <a:tableStyleId>{5C22544A-7EE6-4342-B048-85BDC9FD1C3A}</a:tableStyleId>
+              </a:tblPr>
+              <a:tblGrid>
+                <a:gridCol w="1561841"/>
+                <a:gridCol w="4747998"/>
+                <a:gridCol w="4747998"/>
+              </a:tblGrid>
+              <a:tr h="439420">
+                <a:tc>
+                  <a:txBody>
+                    <a:bodyPr wrap="square"/>
+                    <a:lstStyle/>
+                    <a:p>
+                      <a:pPr algn="l">
+                        <a:lnSpc>
+                          <a:spcPct val="122000"/>
+                        </a:lnSpc>
+                        <a:spcBef>
+                          <a:spcPts val="0"/>
+                        </a:spcBef>
+                        <a:spcAft>
+                          <a:spcPts val="0"/>
+                        </a:spcAft>
+                      </a:pPr>
+                      <a:r>
+                        <a:rPr sz="1700" b="1" i="0">
+                          <a:solidFill>
+                            <a:srgbClr val="FFFFFF"/>
+                          </a:solidFill>
+                          <a:latin typeface="Segoe UI"/>
+                          <a:ea typeface="微软雅黑"/>
+                        </a:rPr>
+                        <a:t>形态</a:t>
+                      </a:r>
+                    </a:p>
+                  </a:txBody>
+                  <a:tcPr marL="100584" marR="100584" marT="27432" marB="27432" anchor="ctr">
+                    <a:solidFill>
+                      <a:srgbClr val="12395B"/>
+                    </a:solidFill>
+                  </a:tcPr>
+                </a:tc>
+                <a:tc>
+                  <a:txBody>
+                    <a:bodyPr wrap="square"/>
+                    <a:lstStyle/>
+                    <a:p>
+                      <a:pPr algn="l">
+                        <a:lnSpc>
+                          <a:spcPct val="122000"/>
+                        </a:lnSpc>
+                        <a:spcBef>
+                          <a:spcPts val="0"/>
+                        </a:spcBef>
+                        <a:spcAft>
+                          <a:spcPts val="0"/>
+                        </a:spcAft>
+                      </a:pPr>
+                      <a:r>
+                        <a:rPr sz="1700" b="1" i="0">
+                          <a:solidFill>
+                            <a:srgbClr val="FFFFFF"/>
+                          </a:solidFill>
+                          <a:latin typeface="Segoe UI"/>
+                          <a:ea typeface="微软雅黑"/>
+                        </a:rPr>
+                        <a:t>用在哪</a:t>
+                      </a:r>
+                    </a:p>
+                  </a:txBody>
+                  <a:tcPr marL="100584" marR="100584" marT="27432" marB="27432" anchor="ctr">
+                    <a:solidFill>
+                      <a:srgbClr val="12395B"/>
+                    </a:solidFill>
+                  </a:tcPr>
+                </a:tc>
+                <a:tc>
+                  <a:txBody>
+                    <a:bodyPr wrap="square"/>
+                    <a:lstStyle/>
+                    <a:p>
+                      <a:pPr algn="l">
+                        <a:lnSpc>
+                          <a:spcPct val="122000"/>
+                        </a:lnSpc>
+                        <a:spcBef>
+                          <a:spcPts val="0"/>
+                        </a:spcBef>
+                        <a:spcAft>
+                          <a:spcPts val="0"/>
+                        </a:spcAft>
+                      </a:pPr>
+                      <a:r>
+                        <a:rPr sz="1700" b="1" i="0">
+                          <a:solidFill>
+                            <a:srgbClr val="FFFFFF"/>
+                          </a:solidFill>
+                          <a:latin typeface="Segoe UI"/>
+                          <a:ea typeface="微软雅黑"/>
+                        </a:rPr>
+                        <a:t>交换什么</a:t>
+                      </a:r>
+                    </a:p>
+                  </a:txBody>
+                  <a:tcPr marL="100584" marR="100584" marT="27432" marB="27432" anchor="ctr">
+                    <a:solidFill>
+                      <a:srgbClr val="12395B"/>
+                    </a:solidFill>
+                  </a:tcPr>
+                </a:tc>
+              </a:tr>
+              <a:tr h="439420">
+                <a:tc>
+                  <a:txBody>
+                    <a:bodyPr wrap="square"/>
+                    <a:lstStyle/>
+                    <a:p>
+                      <a:pPr algn="l">
+                        <a:lnSpc>
+                          <a:spcPct val="122000"/>
+                        </a:lnSpc>
+                        <a:spcBef>
+                          <a:spcPts val="0"/>
+                        </a:spcBef>
+                        <a:spcAft>
+                          <a:spcPts val="0"/>
+                        </a:spcAft>
+                      </a:pPr>
+                      <a:r>
+                        <a:rPr sz="1700" b="0" i="0">
+                          <a:solidFill>
+                            <a:srgbClr val="242A33"/>
+                          </a:solidFill>
+                          <a:latin typeface="Segoe UI"/>
+                          <a:ea typeface="微软雅黑"/>
+                        </a:rPr>
+                        <a:t>相邻交换</a:t>
+                      </a:r>
+                    </a:p>
+                  </a:txBody>
+                  <a:tcPr marL="100584" marR="100584" marT="27432" marB="27432" anchor="ctr">
+                    <a:solidFill>
+                      <a:srgbClr val="FFFFFF"/>
+                    </a:solidFill>
+                  </a:tcPr>
+                </a:tc>
+                <a:tc>
+                  <a:txBody>
+                    <a:bodyPr wrap="square"/>
+                    <a:lstStyle/>
+                    <a:p>
+                      <a:pPr algn="l">
+                        <a:lnSpc>
+                          <a:spcPct val="122000"/>
+                        </a:lnSpc>
+                        <a:spcBef>
+                          <a:spcPts val="0"/>
+                        </a:spcBef>
+                        <a:spcAft>
+                          <a:spcPts val="0"/>
+                        </a:spcAft>
+                      </a:pPr>
+                      <a:r>
+                        <a:rPr sz="1700" b="0" i="0">
+                          <a:solidFill>
+                            <a:srgbClr val="242A33"/>
+                          </a:solidFill>
+                          <a:latin typeface="Segoe UI"/>
+                          <a:ea typeface="微软雅黑"/>
+                        </a:rPr>
+                        <a:t>排序型贪心（12559）</a:t>
+                      </a:r>
+                    </a:p>
+                  </a:txBody>
+                  <a:tcPr marL="100584" marR="100584" marT="27432" marB="27432" anchor="ctr">
+                    <a:solidFill>
+                      <a:srgbClr val="FFFFFF"/>
+                    </a:solidFill>
+                  </a:tcPr>
+                </a:tc>
+                <a:tc>
+                  <a:txBody>
+                    <a:bodyPr wrap="square"/>
+                    <a:lstStyle/>
+                    <a:p>
+                      <a:pPr algn="l">
+                        <a:lnSpc>
+                          <a:spcPct val="122000"/>
+                        </a:lnSpc>
+                        <a:spcBef>
+                          <a:spcPts val="0"/>
+                        </a:spcBef>
+                        <a:spcAft>
+                          <a:spcPts val="0"/>
+                        </a:spcAft>
+                      </a:pPr>
+                      <a:r>
+                        <a:rPr sz="1700" b="0" i="0">
+                          <a:solidFill>
+                            <a:srgbClr val="242A33"/>
+                          </a:solidFill>
+                          <a:latin typeface="Segoe UI"/>
+                          <a:ea typeface="微软雅黑"/>
+                        </a:rPr>
+                        <a:t>OPT 里相邻的两项</a:t>
+                      </a:r>
+                    </a:p>
+                  </a:txBody>
+                  <a:tcPr marL="100584" marR="100584" marT="27432" marB="27432" anchor="ctr">
+                    <a:solidFill>
+                      <a:srgbClr val="FFFFFF"/>
+                    </a:solidFill>
+                  </a:tcPr>
+                </a:tc>
+              </a:tr>
+              <a:tr h="439420">
+                <a:tc>
+                  <a:txBody>
+                    <a:bodyPr wrap="square"/>
+                    <a:lstStyle/>
+                    <a:p>
+                      <a:pPr algn="l">
+                        <a:lnSpc>
+                          <a:spcPct val="122000"/>
+                        </a:lnSpc>
+                        <a:spcBef>
+                          <a:spcPts val="0"/>
+                        </a:spcBef>
+                        <a:spcAft>
+                          <a:spcPts val="0"/>
+                        </a:spcAft>
+                      </a:pPr>
+                      <a:r>
+                        <a:rPr sz="1700" b="0" i="0">
+                          <a:solidFill>
+                            <a:srgbClr val="242A33"/>
+                          </a:solidFill>
+                          <a:latin typeface="Segoe UI"/>
+                          <a:ea typeface="微软雅黑"/>
+                        </a:rPr>
+                        <a:t>首元素替换</a:t>
+                      </a:r>
+                    </a:p>
+                  </a:txBody>
+                  <a:tcPr marL="100584" marR="100584" marT="27432" marB="27432" anchor="ctr">
+                    <a:solidFill>
+                      <a:srgbClr val="F2F4F7"/>
+                    </a:solidFill>
+                  </a:tcPr>
+                </a:tc>
+                <a:tc>
+                  <a:txBody>
+                    <a:bodyPr wrap="square"/>
+                    <a:lstStyle/>
+                    <a:p>
+                      <a:pPr algn="l">
+                        <a:lnSpc>
+                          <a:spcPct val="122000"/>
+                        </a:lnSpc>
+                        <a:spcBef>
+                          <a:spcPts val="0"/>
+                        </a:spcBef>
+                        <a:spcAft>
+                          <a:spcPts val="0"/>
+                        </a:spcAft>
+                      </a:pPr>
+                      <a:r>
+                        <a:rPr sz="1700" b="0" i="0">
+                          <a:solidFill>
+                            <a:srgbClr val="242A33"/>
+                          </a:solidFill>
+                          <a:latin typeface="Segoe UI"/>
+                          <a:ea typeface="微软雅黑"/>
+                        </a:rPr>
+                        <a:t>选择型贪心（第 10 周区间问题）</a:t>
+                      </a:r>
+                    </a:p>
+                  </a:txBody>
+                  <a:tcPr marL="100584" marR="100584" marT="27432" marB="27432" anchor="ctr">
+                    <a:solidFill>
+                      <a:srgbClr val="F2F4F7"/>
+                    </a:solidFill>
+                  </a:tcPr>
+                </a:tc>
+                <a:tc>
+                  <a:txBody>
+                    <a:bodyPr wrap="square"/>
+                    <a:lstStyle/>
+                    <a:p>
+                      <a:pPr algn="l">
+                        <a:lnSpc>
+                          <a:spcPct val="122000"/>
+                        </a:lnSpc>
+                        <a:spcBef>
+                          <a:spcPts val="0"/>
+                        </a:spcBef>
+                        <a:spcAft>
+                          <a:spcPts val="0"/>
+                        </a:spcAft>
+                      </a:pPr>
+                      <a:r>
+                        <a:rPr sz="1700" b="0" i="0">
+                          <a:solidFill>
+                            <a:srgbClr val="242A33"/>
+                          </a:solidFill>
+                          <a:latin typeface="Segoe UI"/>
+                          <a:ea typeface="微软雅黑"/>
+                        </a:rPr>
+                        <a:t>OPT 的第一个选择换成贪心的选择</a:t>
+                      </a:r>
+                    </a:p>
+                  </a:txBody>
+                  <a:tcPr marL="100584" marR="100584" marT="27432" marB="27432" anchor="ctr">
+                    <a:solidFill>
+                      <a:srgbClr val="F2F4F7"/>
+                    </a:solidFill>
+                  </a:tcPr>
+                </a:tc>
+              </a:tr>
+            </a:tbl>
+          </a:graphicData>
+        </a:graphic>
+      </p:graphicFrame>
+      <p:sp>
+        <p:nvSpPr>
+          <p:cNvPr id="5" name="TextBox 4"/>
+          <p:cNvSpPr txBox="1"/>
+          <p:nvPr/>
+        </p:nvSpPr>
+        <p:spPr>
+          <a:xfrm>
+            <a:off x="566928" y="2763012"/>
+            <a:ext cx="11057839" cy="329184"/>
+          </a:xfrm>
+          <a:prstGeom prst="rect">
+            <a:avLst/>
+          </a:prstGeom>
+          <a:noFill/>
+        </p:spPr>
+        <p:txBody>
+          <a:bodyPr wrap="square" lIns="0" rIns="0" tIns="0" bIns="0">
+            <a:noAutofit/>
+          </a:bodyPr>
+          <a:lstStyle/>
+          <a:p>
+            <a:pPr algn="l">
+              <a:spcBef>
+                <a:spcPts val="0"/>
+              </a:spcBef>
+              <a:spcAft>
+                <a:spcPts val="0"/>
+              </a:spcAft>
+            </a:pPr>
+            <a:r>
+              <a:rPr sz="1300" b="0" i="0">
+                <a:solidFill>
+                  <a:srgbClr val="6B7582"/>
+                </a:solidFill>
+                <a:latin typeface="Segoe UI"/>
+                <a:ea typeface="微软雅黑"/>
+              </a:rPr>
+              <a:t>第 10 周会用后一种证「按右端点排」：把 OPT 的第一个区间换成右端点最小的那个，之后能放的只多不少</a:t>
+            </a:r>
+          </a:p>
+        </p:txBody>
+      </p:sp>
+      <p:sp>
+        <p:nvSpPr>
+          <p:cNvPr id="6" name="TextBox 5"/>
+          <p:cNvSpPr txBox="1"/>
+          <p:nvPr/>
+        </p:nvSpPr>
+        <p:spPr>
+          <a:xfrm>
+            <a:off x="566928" y="6327648"/>
+            <a:ext cx="8229600" cy="310896"/>
+          </a:xfrm>
+          <a:prstGeom prst="rect">
+            <a:avLst/>
+          </a:prstGeom>
+          <a:noFill/>
+        </p:spPr>
+        <p:txBody>
+          <a:bodyPr wrap="square" lIns="0" rIns="0" tIns="0" bIns="0">
+            <a:noAutofit/>
+          </a:bodyPr>
+          <a:lstStyle/>
+          <a:p>
+            <a:pPr algn="l">
+              <a:spcBef>
+                <a:spcPts val="0"/>
+              </a:spcBef>
+              <a:spcAft>
+                <a:spcPts val="0"/>
+              </a:spcAft>
+            </a:pPr>
+            <a:r>
+              <a:rPr sz="1000" b="0" i="0">
+                <a:solidFill>
+                  <a:srgbClr val="6B7582"/>
+                </a:solidFill>
+                <a:latin typeface="Segoe UI"/>
+                <a:ea typeface="微软雅黑"/>
+              </a:rPr>
+              <a:t>计算概论（B） · 第6周 · 闫宏飞 · 2026 Fall</a:t>
+            </a:r>
+          </a:p>
+        </p:txBody>
+      </p:sp>
+      <p:sp>
+        <p:nvSpPr>
+          <p:cNvPr id="7" name="TextBox 6"/>
+          <p:cNvSpPr txBox="1"/>
+          <p:nvPr/>
+        </p:nvSpPr>
+        <p:spPr>
+          <a:xfrm>
+            <a:off x="10710367" y="6327648"/>
+            <a:ext cx="914400" cy="310896"/>
+          </a:xfrm>
+          <a:prstGeom prst="rect">
+            <a:avLst/>
+          </a:prstGeom>
+          <a:noFill/>
+        </p:spPr>
+        <p:txBody>
+          <a:bodyPr wrap="square" lIns="0" rIns="0" tIns="0" bIns="0">
+            <a:noAutofit/>
+          </a:bodyPr>
+          <a:lstStyle/>
+          <a:p>
+            <a:pPr algn="r">
+              <a:spcBef>
+                <a:spcPts val="0"/>
+              </a:spcBef>
+              <a:spcAft>
+                <a:spcPts val="0"/>
+              </a:spcAft>
+            </a:pPr>
+            <a:r>
+              <a:rPr sz="1000" b="0" i="0">
+                <a:solidFill>
+                  <a:srgbClr val="6B7582"/>
+                </a:solidFill>
+                <a:latin typeface="Segoe UI"/>
+                <a:ea typeface="微软雅黑"/>
+              </a:rPr>
+              <a:t>23</a:t>
+            </a:r>
+          </a:p>
+        </p:txBody>
+      </p:sp>
+    </p:spTree>
+  </p:cSld>
+  <p:clrMapOvr>
+    <a:masterClrMapping/>
+  </p:clrMapOvr>
+</p:sld>
+</file>
+
+<file path=ppt/slides/slide24.xml><?xml version="1.0" encoding="utf-8"?>
+<p:sld xmlns:a="http://schemas.openxmlformats.org/drawingml/2006/main" xmlns:p="http://schemas.openxmlformats.org/presentationml/2006/main" xmlns:r="http://schemas.openxmlformats.org/officeDocument/2006/relationships">
+  <p:cSld>
+    <p:spTree>
+      <p:nvGrpSpPr>
+        <p:cNvPr id="1" name=""/>
+        <p:cNvGrpSpPr/>
+        <p:nvPr/>
+      </p:nvGrpSpPr>
+      <p:grpSpPr/>
+      <p:sp>
+        <p:nvSpPr>
+          <p:cNvPr id="2" name="TextBox 1"/>
+          <p:cNvSpPr txBox="1"/>
+          <p:nvPr/>
+        </p:nvSpPr>
+        <p:spPr>
+          <a:xfrm>
+            <a:off x="566928" y="420624"/>
+            <a:ext cx="11057839" cy="548640"/>
+          </a:xfrm>
+          <a:prstGeom prst="rect">
+            <a:avLst/>
+          </a:prstGeom>
+          <a:noFill/>
+        </p:spPr>
+        <p:txBody>
+          <a:bodyPr wrap="square" lIns="0" rIns="0" tIns="0" bIns="0">
+            <a:noAutofit/>
+          </a:bodyPr>
+          <a:lstStyle/>
+          <a:p>
+            <a:pPr algn="l">
+              <a:spcBef>
+                <a:spcPts val="0"/>
+              </a:spcBef>
+              <a:spcAft>
+                <a:spcPts val="0"/>
+              </a:spcAft>
+            </a:pPr>
+            <a:r>
+              <a:rPr sz="2600" b="1" i="0">
+                <a:solidFill>
+                  <a:srgbClr val="12395B"/>
+                </a:solidFill>
+                <a:latin typeface="Segoe UI"/>
+                <a:ea typeface="微软雅黑"/>
+              </a:rPr>
+              <a:t>两个必须自己检查的前提</a:t>
+            </a:r>
+          </a:p>
+        </p:txBody>
+      </p:sp>
+      <p:sp>
+        <p:nvSpPr>
+          <p:cNvPr id="3" name="Rectangle 2"/>
+          <p:cNvSpPr/>
+          <p:nvPr/>
+        </p:nvSpPr>
+        <p:spPr>
+          <a:xfrm>
+            <a:off x="566928" y="1060704"/>
+            <a:ext cx="960120" cy="40640"/>
+          </a:xfrm>
+          <a:prstGeom prst="rect">
+            <a:avLst/>
+          </a:prstGeom>
+          <a:solidFill>
+            <a:srgbClr val="E07B39"/>
+          </a:solidFill>
+          <a:ln>
+            <a:noFill/>
+          </a:ln>
+          <a:effectLst/>
+        </p:spPr>
+        <p:style>
+          <a:lnRef idx="1">
+            <a:schemeClr val="accent1"/>
+          </a:lnRef>
+          <a:fillRef idx="3">
+            <a:schemeClr val="accent1"/>
+          </a:fillRef>
+          <a:effectRef idx="2">
+            <a:schemeClr val="accent1"/>
+          </a:effectRef>
+          <a:fontRef idx="minor">
+            <a:schemeClr val="lt1"/>
+          </a:fontRef>
+        </p:style>
+        <p:txBody>
+          <a:bodyPr rtlCol="0" anchor="ctr"/>
+          <a:lstStyle/>
+          <a:p>
+            <a:pPr algn="ctr"/>
+          </a:p>
+        </p:txBody>
+      </p:sp>
+      <p:sp>
+        <p:nvSpPr>
+          <p:cNvPr id="4" name="TextBox 3"/>
+          <p:cNvSpPr txBox="1"/>
+          <p:nvPr/>
+        </p:nvSpPr>
+        <p:spPr>
+          <a:xfrm>
+            <a:off x="566928" y="1298448"/>
+            <a:ext cx="11057839" cy="4864608"/>
+          </a:xfrm>
+          <a:prstGeom prst="rect">
+            <a:avLst/>
+          </a:prstGeom>
+          <a:noFill/>
+        </p:spPr>
+        <p:txBody>
+          <a:bodyPr wrap="square" lIns="0" rIns="0" tIns="0" bIns="0">
+            <a:noAutofit/>
+          </a:bodyPr>
+          <a:lstStyle/>
+          <a:p>
+            <a:pPr algn="l">
+              <a:lnSpc>
+                <a:spcPct val="132000"/>
+              </a:lnSpc>
+              <a:spcBef>
+                <a:spcPts val="0"/>
+              </a:spcBef>
+              <a:spcAft>
+                <a:spcPts val="1240"/>
+              </a:spcAft>
+            </a:pPr>
+            <a:r>
+              <a:rPr sz="2000" b="0" i="0">
+                <a:solidFill>
+                  <a:srgbClr val="242A33"/>
+                </a:solidFill>
+                <a:latin typeface="Segoe UI"/>
+                <a:ea typeface="微软雅黑"/>
+              </a:rPr>
+              <a:t>•  </a:t>
+            </a:r>
+            <a:r>
+              <a:rPr sz="2000" b="1" i="0">
+                <a:solidFill>
+                  <a:srgbClr val="12395B"/>
+                </a:solidFill>
+                <a:latin typeface="Segoe UI"/>
+                <a:ea typeface="微软雅黑"/>
+              </a:rPr>
+              <a:t>一、规则 R 必须是全序</a:t>
+            </a:r>
+            <a:r>
+              <a:rPr sz="2000" b="0" i="0">
+                <a:solidFill>
+                  <a:srgbClr val="242A33"/>
+                </a:solidFill>
+                <a:latin typeface="Segoe UI"/>
+                <a:ea typeface="微软雅黑"/>
+              </a:rPr>
+              <a:t>（传递性）—— 否则「R 序」根本没有定义，「逆序对递减」也就垮了</a:t>
+            </a:r>
+          </a:p>
+          <a:p>
+            <a:pPr algn="l">
+              <a:lnSpc>
+                <a:spcPct val="132000"/>
+              </a:lnSpc>
+              <a:spcBef>
+                <a:spcPts val="0"/>
+              </a:spcBef>
+              <a:spcAft>
+                <a:spcPts val="1240"/>
+              </a:spcAft>
+            </a:pPr>
+            <a:r>
+              <a:rPr sz="2000" b="0" i="0">
+                <a:solidFill>
+                  <a:srgbClr val="242A33"/>
+                </a:solidFill>
+                <a:latin typeface="Segoe UI"/>
+                <a:ea typeface="微软雅黑"/>
+              </a:rPr>
+              <a:t>•  </a:t>
+            </a:r>
+            <a:r>
+              <a:rPr sz="1879" b="0" i="0">
+                <a:solidFill>
+                  <a:srgbClr val="242A33"/>
+                </a:solidFill>
+                <a:latin typeface="Consolas"/>
+                <a:ea typeface="Consolas"/>
+              </a:rPr>
+              <a:t>a+b &gt; b+a</a:t>
+            </a:r>
+            <a:r>
+              <a:rPr sz="2000" b="0" i="0">
+                <a:solidFill>
+                  <a:srgbClr val="242A33"/>
+                </a:solidFill>
+                <a:latin typeface="Segoe UI"/>
+                <a:ea typeface="微软雅黑"/>
+              </a:rPr>
+              <a:t> 的传递性可以证明；</a:t>
+            </a:r>
+            <a:r>
+              <a:rPr sz="2000" b="1" i="0">
+                <a:solidFill>
+                  <a:srgbClr val="12395B"/>
+                </a:solidFill>
+                <a:latin typeface="Segoe UI"/>
+                <a:ea typeface="微软雅黑"/>
+              </a:rPr>
+              <a:t>换一道题要重新验</a:t>
+            </a:r>
+          </a:p>
+          <a:p>
+            <a:pPr algn="l">
+              <a:lnSpc>
+                <a:spcPct val="132000"/>
+              </a:lnSpc>
+              <a:spcBef>
+                <a:spcPts val="0"/>
+              </a:spcBef>
+              <a:spcAft>
+                <a:spcPts val="1240"/>
+              </a:spcAft>
+            </a:pPr>
+            <a:r>
+              <a:rPr sz="2000" b="0" i="0">
+                <a:solidFill>
+                  <a:srgbClr val="242A33"/>
+                </a:solidFill>
+                <a:latin typeface="Segoe UI"/>
+                <a:ea typeface="微软雅黑"/>
+              </a:rPr>
+              <a:t>•  </a:t>
+            </a:r>
+            <a:r>
+              <a:rPr sz="2000" b="1" i="0">
+                <a:solidFill>
+                  <a:srgbClr val="12395B"/>
+                </a:solidFill>
+                <a:latin typeface="Segoe UI"/>
+                <a:ea typeface="微软雅黑"/>
+              </a:rPr>
+              <a:t>浮点数当排序键最容易在这里翻车</a:t>
+            </a:r>
+            <a:r>
+              <a:rPr sz="2000" b="0" i="0">
+                <a:solidFill>
+                  <a:srgbClr val="242A33"/>
+                </a:solidFill>
+                <a:latin typeface="Segoe UI"/>
+                <a:ea typeface="微软雅黑"/>
+              </a:rPr>
+              <a:t>：本该相等的两个键因误差变得一大一小</a:t>
+            </a:r>
+          </a:p>
+          <a:p>
+            <a:pPr algn="l">
+              <a:lnSpc>
+                <a:spcPct val="132000"/>
+              </a:lnSpc>
+              <a:spcBef>
+                <a:spcPts val="0"/>
+              </a:spcBef>
+              <a:spcAft>
+                <a:spcPts val="1240"/>
+              </a:spcAft>
+            </a:pPr>
+            <a:r>
+              <a:rPr sz="2000" b="0" i="0">
+                <a:solidFill>
+                  <a:srgbClr val="242A33"/>
+                </a:solidFill>
+                <a:latin typeface="Segoe UI"/>
+                <a:ea typeface="微软雅黑"/>
+              </a:rPr>
+              <a:t>•  </a:t>
+            </a:r>
+            <a:r>
+              <a:rPr sz="2000" b="1" i="0">
+                <a:solidFill>
+                  <a:srgbClr val="12395B"/>
+                </a:solidFill>
+                <a:latin typeface="Segoe UI"/>
+                <a:ea typeface="微软雅黑"/>
+              </a:rPr>
+              <a:t>二、「交换只影响这两项」要真的成立</a:t>
+            </a:r>
+            <a:r>
+              <a:rPr sz="2000" b="0" i="0">
+                <a:solidFill>
+                  <a:srgbClr val="242A33"/>
+                </a:solidFill>
+                <a:latin typeface="Segoe UI"/>
+                <a:ea typeface="微软雅黑"/>
+              </a:rPr>
+              <a:t> —— 这是相邻交换全部的立足点</a:t>
+            </a:r>
+          </a:p>
+          <a:p>
+            <a:pPr algn="l">
+              <a:lnSpc>
+                <a:spcPct val="132000"/>
+              </a:lnSpc>
+              <a:spcBef>
+                <a:spcPts val="0"/>
+              </a:spcBef>
+              <a:spcAft>
+                <a:spcPts val="1240"/>
+              </a:spcAft>
+            </a:pPr>
+            <a:r>
+              <a:rPr sz="2000" b="0" i="0">
+                <a:solidFill>
+                  <a:srgbClr val="242A33"/>
+                </a:solidFill>
+                <a:latin typeface="Segoe UI"/>
+                <a:ea typeface="微软雅黑"/>
+              </a:rPr>
+              <a:t>•  题目里若有跨项耦合（代价依赖全局某个量），这一步必须重算，不能照抄</a:t>
+            </a:r>
+          </a:p>
+          <a:p>
+            <a:pPr algn="l">
+              <a:lnSpc>
+                <a:spcPct val="132000"/>
+              </a:lnSpc>
+              <a:spcBef>
+                <a:spcPts val="0"/>
+              </a:spcBef>
+              <a:spcAft>
+                <a:spcPts val="1240"/>
+              </a:spcAft>
+            </a:pPr>
+            <a:r>
+              <a:rPr sz="2000" b="0" i="0">
+                <a:solidFill>
+                  <a:srgbClr val="242A33"/>
+                </a:solidFill>
+                <a:latin typeface="Segoe UI"/>
+                <a:ea typeface="微软雅黑"/>
+              </a:rPr>
+              <a:t>•  交换论证不是事后安慰自己「大概是对的」，是</a:t>
+            </a:r>
+            <a:r>
+              <a:rPr sz="2000" b="1" i="0">
+                <a:solidFill>
+                  <a:srgbClr val="12395B"/>
+                </a:solidFill>
+                <a:latin typeface="Segoe UI"/>
+                <a:ea typeface="微软雅黑"/>
+              </a:rPr>
+              <a:t>动手之前把排序键算出来</a:t>
+            </a:r>
+          </a:p>
+        </p:txBody>
+      </p:sp>
+      <p:sp>
+        <p:nvSpPr>
+          <p:cNvPr id="5" name="TextBox 4"/>
+          <p:cNvSpPr txBox="1"/>
+          <p:nvPr/>
+        </p:nvSpPr>
+        <p:spPr>
+          <a:xfrm>
+            <a:off x="566928" y="6327648"/>
+            <a:ext cx="8229600" cy="310896"/>
+          </a:xfrm>
+          <a:prstGeom prst="rect">
+            <a:avLst/>
+          </a:prstGeom>
+          <a:noFill/>
+        </p:spPr>
+        <p:txBody>
+          <a:bodyPr wrap="square" lIns="0" rIns="0" tIns="0" bIns="0">
+            <a:noAutofit/>
+          </a:bodyPr>
+          <a:lstStyle/>
+          <a:p>
+            <a:pPr algn="l">
+              <a:spcBef>
+                <a:spcPts val="0"/>
+              </a:spcBef>
+              <a:spcAft>
+                <a:spcPts val="0"/>
+              </a:spcAft>
+            </a:pPr>
+            <a:r>
+              <a:rPr sz="1000" b="0" i="0">
+                <a:solidFill>
+                  <a:srgbClr val="6B7582"/>
+                </a:solidFill>
+                <a:latin typeface="Segoe UI"/>
+                <a:ea typeface="微软雅黑"/>
+              </a:rPr>
+              <a:t>计算概论（B） · 第6周 · 闫宏飞 · 2026 Fall</a:t>
+            </a:r>
+          </a:p>
+        </p:txBody>
+      </p:sp>
+      <p:sp>
+        <p:nvSpPr>
+          <p:cNvPr id="6" name="TextBox 5"/>
+          <p:cNvSpPr txBox="1"/>
+          <p:nvPr/>
+        </p:nvSpPr>
+        <p:spPr>
+          <a:xfrm>
+            <a:off x="10710367" y="6327648"/>
+            <a:ext cx="914400" cy="310896"/>
+          </a:xfrm>
+          <a:prstGeom prst="rect">
+            <a:avLst/>
+          </a:prstGeom>
+          <a:noFill/>
+        </p:spPr>
+        <p:txBody>
+          <a:bodyPr wrap="square" lIns="0" rIns="0" tIns="0" bIns="0">
+            <a:noAutofit/>
+          </a:bodyPr>
+          <a:lstStyle/>
+          <a:p>
+            <a:pPr algn="r">
+              <a:spcBef>
+                <a:spcPts val="0"/>
+              </a:spcBef>
+              <a:spcAft>
+                <a:spcPts val="0"/>
+              </a:spcAft>
+            </a:pPr>
+            <a:r>
+              <a:rPr sz="1000" b="0" i="0">
+                <a:solidFill>
+                  <a:srgbClr val="6B7582"/>
+                </a:solidFill>
+                <a:latin typeface="Segoe UI"/>
+                <a:ea typeface="微软雅黑"/>
+              </a:rPr>
+              <a:t>24</a:t>
+            </a:r>
+          </a:p>
+        </p:txBody>
+      </p:sp>
+    </p:spTree>
+  </p:cSld>
+  <p:clrMapOvr>
+    <a:masterClrMapping/>
+  </p:clrMapOvr>
+</p:sld>
+</file>
+
+<file path=ppt/slides/slide25.xml><?xml version="1.0" encoding="utf-8"?>
+<p:sld xmlns:a="http://schemas.openxmlformats.org/drawingml/2006/main" xmlns:p="http://schemas.openxmlformats.org/presentationml/2006/main" xmlns:r="http://schemas.openxmlformats.org/officeDocument/2006/relationships">
+  <p:cSld>
+    <p:spTree>
+      <p:nvGrpSpPr>
+        <p:cNvPr id="1" name=""/>
+        <p:cNvGrpSpPr/>
+        <p:nvPr/>
+      </p:nvGrpSpPr>
+      <p:grpSpPr/>
+      <p:sp>
+        <p:nvSpPr>
+          <p:cNvPr id="2" name="TextBox 1"/>
+          <p:cNvSpPr txBox="1"/>
+          <p:nvPr/>
+        </p:nvSpPr>
+        <p:spPr>
+          <a:xfrm>
+            <a:off x="566928" y="420624"/>
+            <a:ext cx="11057839" cy="548640"/>
+          </a:xfrm>
+          <a:prstGeom prst="rect">
+            <a:avLst/>
+          </a:prstGeom>
+          <a:noFill/>
+        </p:spPr>
+        <p:txBody>
+          <a:bodyPr wrap="square" lIns="0" rIns="0" tIns="0" bIns="0">
+            <a:noAutofit/>
+          </a:bodyPr>
+          <a:lstStyle/>
+          <a:p>
+            <a:pPr algn="l">
+              <a:spcBef>
+                <a:spcPts val="0"/>
+              </a:spcBef>
+              <a:spcAft>
+                <a:spcPts val="0"/>
+              </a:spcAft>
+            </a:pPr>
+            <a:r>
+              <a:rPr sz="2600" b="1" i="0">
+                <a:solidFill>
+                  <a:srgbClr val="12395B"/>
+                </a:solidFill>
+                <a:latin typeface="Segoe UI"/>
+                <a:ea typeface="微软雅黑"/>
+              </a:rPr>
               <a:t>19948 因材施教 / 18211 军备竞赛</a:t>
             </a:r>
           </a:p>
@@ -10813,7 +13462,7 @@
                 <a:latin typeface="Segoe UI"/>
                 <a:ea typeface="微软雅黑"/>
               </a:rPr>
-              <a:t>20</a:t>
+              <a:t>25</a:t>
             </a:r>
           </a:p>
         </p:txBody>
@@ -10826,7 +13475,7 @@
 </p:sld>
 </file>
 
-<file path=ppt/slides/slide21.xml><?xml version="1.0" encoding="utf-8"?>
+<file path=ppt/slides/slide26.xml><?xml version="1.0" encoding="utf-8"?>
 <p:sld xmlns:a="http://schemas.openxmlformats.org/drawingml/2006/main" xmlns:p="http://schemas.openxmlformats.org/presentationml/2006/main" xmlns:r="http://schemas.openxmlformats.org/officeDocument/2006/relationships">
   <p:cSld>
     <p:spTree>
@@ -11759,7 +14408,7 @@
                 <a:latin typeface="Segoe UI"/>
                 <a:ea typeface="微软雅黑"/>
               </a:rPr>
-              <a:t>21</a:t>
+              <a:t>26</a:t>
             </a:r>
           </a:p>
         </p:txBody>
@@ -11772,7 +14421,7 @@
 </p:sld>
 </file>
 
-<file path=ppt/slides/slide22.xml><?xml version="1.0" encoding="utf-8"?>
+<file path=ppt/slides/slide27.xml><?xml version="1.0" encoding="utf-8"?>
 <p:sld xmlns:a="http://schemas.openxmlformats.org/drawingml/2006/main" xmlns:p="http://schemas.openxmlformats.org/presentationml/2006/main" xmlns:r="http://schemas.openxmlformats.org/officeDocument/2006/relationships">
   <p:cSld>
     <p:spTree>
@@ -11941,7 +14590,7 @@
 </p:sld>
 </file>
 
-<file path=ppt/slides/slide23.xml><?xml version="1.0" encoding="utf-8"?>
+<file path=ppt/slides/slide28.xml><?xml version="1.0" encoding="utf-8"?>
 <p:sld xmlns:a="http://schemas.openxmlformats.org/drawingml/2006/main" xmlns:p="http://schemas.openxmlformats.org/presentationml/2006/main" xmlns:r="http://schemas.openxmlformats.org/officeDocument/2006/relationships">
   <p:cSld>
     <p:spTree>
@@ -12763,7 +15412,7 @@
                 <a:latin typeface="Segoe UI"/>
                 <a:ea typeface="微软雅黑"/>
               </a:rPr>
-              <a:t>23</a:t>
+              <a:t>28</a:t>
             </a:r>
           </a:p>
         </p:txBody>
@@ -12776,7 +15425,7 @@
 </p:sld>
 </file>
 
-<file path=ppt/slides/slide24.xml><?xml version="1.0" encoding="utf-8"?>
+<file path=ppt/slides/slide29.xml><?xml version="1.0" encoding="utf-8"?>
 <p:sld xmlns:a="http://schemas.openxmlformats.org/drawingml/2006/main" xmlns:p="http://schemas.openxmlformats.org/presentationml/2006/main" xmlns:r="http://schemas.openxmlformats.org/officeDocument/2006/relationships">
   <p:cSld>
     <p:spTree>
@@ -13577,7 +16226,7 @@
                 <a:latin typeface="Segoe UI"/>
                 <a:ea typeface="微软雅黑"/>
               </a:rPr>
-              <a:t>24</a:t>
+              <a:t>29</a:t>
             </a:r>
           </a:p>
         </p:txBody>
@@ -13590,7 +16239,176 @@
 </p:sld>
 </file>
 
-<file path=ppt/slides/slide25.xml><?xml version="1.0" encoding="utf-8"?>
+<file path=ppt/slides/slide3.xml><?xml version="1.0" encoding="utf-8"?>
+<p:sld xmlns:a="http://schemas.openxmlformats.org/drawingml/2006/main" xmlns:p="http://schemas.openxmlformats.org/presentationml/2006/main" xmlns:r="http://schemas.openxmlformats.org/officeDocument/2006/relationships">
+  <p:cSld>
+    <p:spTree>
+      <p:nvGrpSpPr>
+        <p:cNvPr id="1" name=""/>
+        <p:cNvGrpSpPr/>
+        <p:nvPr/>
+      </p:nvGrpSpPr>
+      <p:grpSpPr/>
+      <p:sp>
+        <p:nvSpPr>
+          <p:cNvPr id="2" name="Rectangle 1"/>
+          <p:cNvSpPr/>
+          <p:nvPr/>
+        </p:nvSpPr>
+        <p:spPr>
+          <a:xfrm>
+            <a:off x="0" y="0"/>
+            <a:ext cx="12191695" cy="6858000"/>
+          </a:xfrm>
+          <a:prstGeom prst="rect">
+            <a:avLst/>
+          </a:prstGeom>
+          <a:solidFill>
+            <a:srgbClr val="F2F4F7"/>
+          </a:solidFill>
+          <a:ln>
+            <a:noFill/>
+          </a:ln>
+          <a:effectLst/>
+        </p:spPr>
+        <p:style>
+          <a:lnRef idx="1">
+            <a:schemeClr val="accent1"/>
+          </a:lnRef>
+          <a:fillRef idx="3">
+            <a:schemeClr val="accent1"/>
+          </a:fillRef>
+          <a:effectRef idx="2">
+            <a:schemeClr val="accent1"/>
+          </a:effectRef>
+          <a:fontRef idx="minor">
+            <a:schemeClr val="lt1"/>
+          </a:fontRef>
+        </p:style>
+        <p:txBody>
+          <a:bodyPr rtlCol="0" anchor="ctr"/>
+          <a:lstStyle/>
+          <a:p>
+            <a:pPr algn="ctr"/>
+          </a:p>
+        </p:txBody>
+      </p:sp>
+      <p:sp>
+        <p:nvSpPr>
+          <p:cNvPr id="3" name="Rectangle 2"/>
+          <p:cNvSpPr/>
+          <p:nvPr/>
+        </p:nvSpPr>
+        <p:spPr>
+          <a:xfrm>
+            <a:off x="0" y="2331720"/>
+            <a:ext cx="274320" cy="1737360"/>
+          </a:xfrm>
+          <a:prstGeom prst="rect">
+            <a:avLst/>
+          </a:prstGeom>
+          <a:solidFill>
+            <a:srgbClr val="E07B39"/>
+          </a:solidFill>
+          <a:ln>
+            <a:noFill/>
+          </a:ln>
+          <a:effectLst/>
+        </p:spPr>
+        <p:style>
+          <a:lnRef idx="1">
+            <a:schemeClr val="accent1"/>
+          </a:lnRef>
+          <a:fillRef idx="3">
+            <a:schemeClr val="accent1"/>
+          </a:fillRef>
+          <a:effectRef idx="2">
+            <a:schemeClr val="accent1"/>
+          </a:effectRef>
+          <a:fontRef idx="minor">
+            <a:schemeClr val="lt1"/>
+          </a:fontRef>
+        </p:style>
+        <p:txBody>
+          <a:bodyPr rtlCol="0" anchor="ctr"/>
+          <a:lstStyle/>
+          <a:p>
+            <a:pPr algn="ctr"/>
+          </a:p>
+        </p:txBody>
+      </p:sp>
+      <p:sp>
+        <p:nvSpPr>
+          <p:cNvPr id="4" name="TextBox 3"/>
+          <p:cNvSpPr txBox="1"/>
+          <p:nvPr/>
+        </p:nvSpPr>
+        <p:spPr>
+          <a:xfrm>
+            <a:off x="868680" y="2395728"/>
+            <a:ext cx="10424160" cy="1737360"/>
+          </a:xfrm>
+          <a:prstGeom prst="rect">
+            <a:avLst/>
+          </a:prstGeom>
+          <a:noFill/>
+        </p:spPr>
+        <p:txBody>
+          <a:bodyPr wrap="square" lIns="0" rIns="0" tIns="0" bIns="0">
+            <a:noAutofit/>
+          </a:bodyPr>
+          <a:lstStyle/>
+          <a:p>
+            <a:pPr algn="l">
+              <a:spcBef>
+                <a:spcPts val="0"/>
+              </a:spcBef>
+              <a:spcAft>
+                <a:spcPts val="800"/>
+              </a:spcAft>
+            </a:pPr>
+            <a:r>
+              <a:rPr sz="1500" b="1" i="0">
+                <a:solidFill>
+                  <a:srgbClr val="E07B39"/>
+                </a:solidFill>
+                <a:latin typeface="Segoe UI"/>
+                <a:ea typeface="微软雅黑"/>
+              </a:rPr>
+              <a:t>第 1 节</a:t>
+            </a:r>
+          </a:p>
+          <a:p>
+            <a:pPr algn="l">
+              <a:spcBef>
+                <a:spcPts val="0"/>
+              </a:spcBef>
+              <a:spcAft>
+                <a:spcPts val="800"/>
+              </a:spcAft>
+            </a:pPr>
+            <a:r>
+              <a:rPr sz="3400" b="1" i="0">
+                <a:solidFill>
+                  <a:srgbClr val="12395B"/>
+                </a:solidFill>
+                <a:latin typeface="Segoe UI"/>
+                <a:ea typeface="微软雅黑"/>
+              </a:rPr>
+              <a:t>矩阵</a:t>
+            </a:r>
+          </a:p>
+        </p:txBody>
+      </p:sp>
+    </p:spTree>
+  </p:cSld>
+  <p:clrMapOvr>
+    <a:masterClrMapping/>
+  </p:clrMapOvr>
+</p:sld>
+</file>
+
+<file path=ppt/slides/slide30.xml><?xml version="1.0" encoding="utf-8"?>
 <p:sld xmlns:a="http://schemas.openxmlformats.org/drawingml/2006/main" xmlns:p="http://schemas.openxmlformats.org/presentationml/2006/main" xmlns:r="http://schemas.openxmlformats.org/officeDocument/2006/relationships">
   <p:cSld>
     <p:spTree>
@@ -15176,7 +17994,7 @@
                 <a:latin typeface="Segoe UI"/>
                 <a:ea typeface="微软雅黑"/>
               </a:rPr>
-              <a:t>25</a:t>
+              <a:t>30</a:t>
             </a:r>
           </a:p>
         </p:txBody>
@@ -15189,7 +18007,7 @@
 </p:sld>
 </file>
 
-<file path=ppt/slides/slide26.xml><?xml version="1.0" encoding="utf-8"?>
+<file path=ppt/slides/slide31.xml><?xml version="1.0" encoding="utf-8"?>
 <p:sld xmlns:a="http://schemas.openxmlformats.org/drawingml/2006/main" xmlns:p="http://schemas.openxmlformats.org/presentationml/2006/main" xmlns:r="http://schemas.openxmlformats.org/officeDocument/2006/relationships">
   <p:cSld>
     <p:spTree>
@@ -15542,6 +18360,69 @@
               </a:spcAft>
             </a:pPr>
             <a:r>
+              <a:rPr sz="2000" b="0" i="0">
+                <a:solidFill>
+                  <a:srgbClr val="242A33"/>
+                </a:solidFill>
+                <a:latin typeface="Segoe UI"/>
+                <a:ea typeface="微软雅黑"/>
+              </a:rPr>
+              <a:t>•  </a:t>
+            </a:r>
+            <a:r>
+              <a:rPr sz="2000" b="1" i="0">
+                <a:solidFill>
+                  <a:srgbClr val="12395B"/>
+                </a:solidFill>
+                <a:latin typeface="Segoe UI"/>
+                <a:ea typeface="微软雅黑"/>
+              </a:rPr>
+              <a:t>排序键要用交换论证推，不要猜</a:t>
+            </a:r>
+            <a:r>
+              <a:rPr sz="2000" b="0" i="0">
+                <a:solidFill>
+                  <a:srgbClr val="242A33"/>
+                </a:solidFill>
+                <a:latin typeface="Segoe UI"/>
+                <a:ea typeface="微软雅黑"/>
+              </a:rPr>
+              <a:t>：写出相邻两项两种摆法的代价，令「a 在前」不劣，化简出的不等式就是 </a:t>
+            </a:r>
+            <a:r>
+              <a:rPr sz="1879" b="0" i="0">
+                <a:solidFill>
+                  <a:srgbClr val="242A33"/>
+                </a:solidFill>
+                <a:latin typeface="Consolas"/>
+                <a:ea typeface="Consolas"/>
+              </a:rPr>
+              <a:t>key</a:t>
+            </a:r>
+            <a:r>
+              <a:rPr sz="2000" b="0" i="0">
+                <a:solidFill>
+                  <a:srgbClr val="242A33"/>
+                </a:solidFill>
+                <a:latin typeface="Segoe UI"/>
+                <a:ea typeface="微软雅黑"/>
+              </a:rPr>
+              <a:t>；推完必须对拍</a:t>
+            </a:r>
+          </a:p>
+          <a:p>
+            <a:pPr algn="l">
+              <a:lnSpc>
+                <a:spcPct val="132000"/>
+              </a:lnSpc>
+              <a:spcBef>
+                <a:spcPts val="0"/>
+              </a:spcBef>
+              <a:spcAft>
+                <a:spcPts val="1240"/>
+              </a:spcAft>
+            </a:pPr>
+            <a:r>
               <a:rPr sz="2000" b="1" i="0">
                 <a:solidFill>
                   <a:srgbClr val="12395B"/>
@@ -15635,7 +18516,7 @@
                 <a:latin typeface="Segoe UI"/>
                 <a:ea typeface="微软雅黑"/>
               </a:rPr>
-              <a:t>26</a:t>
+              <a:t>31</a:t>
             </a:r>
           </a:p>
         </p:txBody>
@@ -15648,7 +18529,7 @@
 </p:sld>
 </file>
 
-<file path=ppt/slides/slide27.xml><?xml version="1.0" encoding="utf-8"?>
+<file path=ppt/slides/slide32.xml><?xml version="1.0" encoding="utf-8"?>
 <p:sld xmlns:a="http://schemas.openxmlformats.org/drawingml/2006/main" xmlns:p="http://schemas.openxmlformats.org/presentationml/2006/main" xmlns:r="http://schemas.openxmlformats.org/officeDocument/2006/relationships">
   <p:cSld>
     <p:spTree>
@@ -15960,176 +18841,7 @@
                 <a:latin typeface="Segoe UI"/>
                 <a:ea typeface="微软雅黑"/>
               </a:rPr>
-              <a:t>27</a:t>
-            </a:r>
-          </a:p>
-        </p:txBody>
-      </p:sp>
-    </p:spTree>
-  </p:cSld>
-  <p:clrMapOvr>
-    <a:masterClrMapping/>
-  </p:clrMapOvr>
-</p:sld>
-</file>
-
-<file path=ppt/slides/slide3.xml><?xml version="1.0" encoding="utf-8"?>
-<p:sld xmlns:a="http://schemas.openxmlformats.org/drawingml/2006/main" xmlns:p="http://schemas.openxmlformats.org/presentationml/2006/main" xmlns:r="http://schemas.openxmlformats.org/officeDocument/2006/relationships">
-  <p:cSld>
-    <p:spTree>
-      <p:nvGrpSpPr>
-        <p:cNvPr id="1" name=""/>
-        <p:cNvGrpSpPr/>
-        <p:nvPr/>
-      </p:nvGrpSpPr>
-      <p:grpSpPr/>
-      <p:sp>
-        <p:nvSpPr>
-          <p:cNvPr id="2" name="Rectangle 1"/>
-          <p:cNvSpPr/>
-          <p:nvPr/>
-        </p:nvSpPr>
-        <p:spPr>
-          <a:xfrm>
-            <a:off x="0" y="0"/>
-            <a:ext cx="12191695" cy="6858000"/>
-          </a:xfrm>
-          <a:prstGeom prst="rect">
-            <a:avLst/>
-          </a:prstGeom>
-          <a:solidFill>
-            <a:srgbClr val="F2F4F7"/>
-          </a:solidFill>
-          <a:ln>
-            <a:noFill/>
-          </a:ln>
-          <a:effectLst/>
-        </p:spPr>
-        <p:style>
-          <a:lnRef idx="1">
-            <a:schemeClr val="accent1"/>
-          </a:lnRef>
-          <a:fillRef idx="3">
-            <a:schemeClr val="accent1"/>
-          </a:fillRef>
-          <a:effectRef idx="2">
-            <a:schemeClr val="accent1"/>
-          </a:effectRef>
-          <a:fontRef idx="minor">
-            <a:schemeClr val="lt1"/>
-          </a:fontRef>
-        </p:style>
-        <p:txBody>
-          <a:bodyPr rtlCol="0" anchor="ctr"/>
-          <a:lstStyle/>
-          <a:p>
-            <a:pPr algn="ctr"/>
-          </a:p>
-        </p:txBody>
-      </p:sp>
-      <p:sp>
-        <p:nvSpPr>
-          <p:cNvPr id="3" name="Rectangle 2"/>
-          <p:cNvSpPr/>
-          <p:nvPr/>
-        </p:nvSpPr>
-        <p:spPr>
-          <a:xfrm>
-            <a:off x="0" y="2331720"/>
-            <a:ext cx="274320" cy="1737360"/>
-          </a:xfrm>
-          <a:prstGeom prst="rect">
-            <a:avLst/>
-          </a:prstGeom>
-          <a:solidFill>
-            <a:srgbClr val="E07B39"/>
-          </a:solidFill>
-          <a:ln>
-            <a:noFill/>
-          </a:ln>
-          <a:effectLst/>
-        </p:spPr>
-        <p:style>
-          <a:lnRef idx="1">
-            <a:schemeClr val="accent1"/>
-          </a:lnRef>
-          <a:fillRef idx="3">
-            <a:schemeClr val="accent1"/>
-          </a:fillRef>
-          <a:effectRef idx="2">
-            <a:schemeClr val="accent1"/>
-          </a:effectRef>
-          <a:fontRef idx="minor">
-            <a:schemeClr val="lt1"/>
-          </a:fontRef>
-        </p:style>
-        <p:txBody>
-          <a:bodyPr rtlCol="0" anchor="ctr"/>
-          <a:lstStyle/>
-          <a:p>
-            <a:pPr algn="ctr"/>
-          </a:p>
-        </p:txBody>
-      </p:sp>
-      <p:sp>
-        <p:nvSpPr>
-          <p:cNvPr id="4" name="TextBox 3"/>
-          <p:cNvSpPr txBox="1"/>
-          <p:nvPr/>
-        </p:nvSpPr>
-        <p:spPr>
-          <a:xfrm>
-            <a:off x="868680" y="2395728"/>
-            <a:ext cx="10424160" cy="1737360"/>
-          </a:xfrm>
-          <a:prstGeom prst="rect">
-            <a:avLst/>
-          </a:prstGeom>
-          <a:noFill/>
-        </p:spPr>
-        <p:txBody>
-          <a:bodyPr wrap="square" lIns="0" rIns="0" tIns="0" bIns="0">
-            <a:noAutofit/>
-          </a:bodyPr>
-          <a:lstStyle/>
-          <a:p>
-            <a:pPr algn="l">
-              <a:spcBef>
-                <a:spcPts val="0"/>
-              </a:spcBef>
-              <a:spcAft>
-                <a:spcPts val="800"/>
-              </a:spcAft>
-            </a:pPr>
-            <a:r>
-              <a:rPr sz="1500" b="1" i="0">
-                <a:solidFill>
-                  <a:srgbClr val="E07B39"/>
-                </a:solidFill>
-                <a:latin typeface="Segoe UI"/>
-                <a:ea typeface="微软雅黑"/>
-              </a:rPr>
-              <a:t>第 1 节</a:t>
-            </a:r>
-          </a:p>
-          <a:p>
-            <a:pPr algn="l">
-              <a:spcBef>
-                <a:spcPts val="0"/>
-              </a:spcBef>
-              <a:spcAft>
-                <a:spcPts val="800"/>
-              </a:spcAft>
-            </a:pPr>
-            <a:r>
-              <a:rPr sz="3400" b="1" i="0">
-                <a:solidFill>
-                  <a:srgbClr val="12395B"/>
-                </a:solidFill>
-                <a:latin typeface="Segoe UI"/>
-                <a:ea typeface="微软雅黑"/>
-              </a:rPr>
-              <a:t>矩阵</a:t>
+              <a:t>32</a:t>
             </a:r>
           </a:p>
         </p:txBody>
